--- a/Kovta_Nyrt_HU.pptx
+++ b/Kovta_Nyrt_HU.pptx
@@ -2108,7 +2108,7 @@
           <a:p>
             <a:fld id="{64E71317-EACD-4ACE-B971-84E39F8DD59C}" type="datetimeFigureOut">
               <a:rPr lang="hu-HU" smtClean="0"/>
-              <a:t>2026. 02. 27.</a:t>
+              <a:t>2026. 03. 02.</a:t>
             </a:fld>
             <a:endParaRPr lang="hu-HU"/>
           </a:p>
@@ -2395,7 +2395,7 @@
           <a:p>
             <a:fld id="{64E71317-EACD-4ACE-B971-84E39F8DD59C}" type="datetimeFigureOut">
               <a:rPr lang="hu-HU" smtClean="0"/>
-              <a:t>2026. 02. 27.</a:t>
+              <a:t>2026. 03. 02.</a:t>
             </a:fld>
             <a:endParaRPr lang="hu-HU"/>
           </a:p>
@@ -2601,7 +2601,7 @@
           <a:p>
             <a:fld id="{64E71317-EACD-4ACE-B971-84E39F8DD59C}" type="datetimeFigureOut">
               <a:rPr lang="hu-HU" smtClean="0"/>
-              <a:t>2026. 02. 27.</a:t>
+              <a:t>2026. 03. 02.</a:t>
             </a:fld>
             <a:endParaRPr lang="hu-HU"/>
           </a:p>
@@ -2886,7 +2886,7 @@
           <a:p>
             <a:fld id="{64E71317-EACD-4ACE-B971-84E39F8DD59C}" type="datetimeFigureOut">
               <a:rPr lang="hu-HU" smtClean="0"/>
-              <a:t>2026. 02. 27.</a:t>
+              <a:t>2026. 03. 02.</a:t>
             </a:fld>
             <a:endParaRPr lang="hu-HU"/>
           </a:p>
@@ -3239,7 +3239,7 @@
           <a:p>
             <a:fld id="{64E71317-EACD-4ACE-B971-84E39F8DD59C}" type="datetimeFigureOut">
               <a:rPr lang="hu-HU" smtClean="0"/>
-              <a:t>2026. 02. 27.</a:t>
+              <a:t>2026. 03. 02.</a:t>
             </a:fld>
             <a:endParaRPr lang="hu-HU"/>
           </a:p>
@@ -3874,7 +3874,7 @@
           <a:p>
             <a:fld id="{64E71317-EACD-4ACE-B971-84E39F8DD59C}" type="datetimeFigureOut">
               <a:rPr lang="hu-HU" smtClean="0"/>
-              <a:t>2026. 02. 27.</a:t>
+              <a:t>2026. 03. 02.</a:t>
             </a:fld>
             <a:endParaRPr lang="hu-HU"/>
           </a:p>
@@ -4746,7 +4746,7 @@
           <a:p>
             <a:fld id="{64E71317-EACD-4ACE-B971-84E39F8DD59C}" type="datetimeFigureOut">
               <a:rPr lang="hu-HU" smtClean="0"/>
-              <a:t>2026. 02. 27.</a:t>
+              <a:t>2026. 03. 02.</a:t>
             </a:fld>
             <a:endParaRPr lang="hu-HU"/>
           </a:p>
@@ -4928,7 +4928,7 @@
           <a:p>
             <a:fld id="{64E71317-EACD-4ACE-B971-84E39F8DD59C}" type="datetimeFigureOut">
               <a:rPr lang="hu-HU" smtClean="0"/>
-              <a:t>2026. 02. 27.</a:t>
+              <a:t>2026. 03. 02.</a:t>
             </a:fld>
             <a:endParaRPr lang="hu-HU"/>
           </a:p>
@@ -5120,7 +5120,7 @@
           <a:p>
             <a:fld id="{64E71317-EACD-4ACE-B971-84E39F8DD59C}" type="datetimeFigureOut">
               <a:rPr lang="hu-HU" smtClean="0"/>
-              <a:t>2026. 02. 27.</a:t>
+              <a:t>2026. 03. 02.</a:t>
             </a:fld>
             <a:endParaRPr lang="hu-HU"/>
           </a:p>
@@ -5302,7 +5302,7 @@
           <a:p>
             <a:fld id="{64E71317-EACD-4ACE-B971-84E39F8DD59C}" type="datetimeFigureOut">
               <a:rPr lang="hu-HU" smtClean="0"/>
-              <a:t>2026. 02. 27.</a:t>
+              <a:t>2026. 03. 02.</a:t>
             </a:fld>
             <a:endParaRPr lang="hu-HU"/>
           </a:p>
@@ -5561,7 +5561,7 @@
           <a:p>
             <a:fld id="{64E71317-EACD-4ACE-B971-84E39F8DD59C}" type="datetimeFigureOut">
               <a:rPr lang="hu-HU" smtClean="0"/>
-              <a:t>2026. 02. 27.</a:t>
+              <a:t>2026. 03. 02.</a:t>
             </a:fld>
             <a:endParaRPr lang="hu-HU"/>
           </a:p>
@@ -5865,7 +5865,7 @@
           <a:p>
             <a:fld id="{64E71317-EACD-4ACE-B971-84E39F8DD59C}" type="datetimeFigureOut">
               <a:rPr lang="hu-HU" smtClean="0"/>
-              <a:t>2026. 02. 27.</a:t>
+              <a:t>2026. 03. 02.</a:t>
             </a:fld>
             <a:endParaRPr lang="hu-HU"/>
           </a:p>
@@ -6321,7 +6321,7 @@
           <a:p>
             <a:fld id="{64E71317-EACD-4ACE-B971-84E39F8DD59C}" type="datetimeFigureOut">
               <a:rPr lang="hu-HU" smtClean="0"/>
-              <a:t>2026. 02. 27.</a:t>
+              <a:t>2026. 03. 02.</a:t>
             </a:fld>
             <a:endParaRPr lang="hu-HU"/>
           </a:p>
@@ -6451,7 +6451,7 @@
           <a:p>
             <a:fld id="{64E71317-EACD-4ACE-B971-84E39F8DD59C}" type="datetimeFigureOut">
               <a:rPr lang="hu-HU" smtClean="0"/>
-              <a:t>2026. 02. 27.</a:t>
+              <a:t>2026. 03. 02.</a:t>
             </a:fld>
             <a:endParaRPr lang="hu-HU"/>
           </a:p>
@@ -6558,7 +6558,7 @@
           <a:p>
             <a:fld id="{64E71317-EACD-4ACE-B971-84E39F8DD59C}" type="datetimeFigureOut">
               <a:rPr lang="hu-HU" smtClean="0"/>
-              <a:t>2026. 02. 27.</a:t>
+              <a:t>2026. 03. 02.</a:t>
             </a:fld>
             <a:endParaRPr lang="hu-HU"/>
           </a:p>
@@ -6849,7 +6849,7 @@
           <a:p>
             <a:fld id="{64E71317-EACD-4ACE-B971-84E39F8DD59C}" type="datetimeFigureOut">
               <a:rPr lang="hu-HU" smtClean="0"/>
-              <a:t>2026. 02. 27.</a:t>
+              <a:t>2026. 03. 02.</a:t>
             </a:fld>
             <a:endParaRPr lang="hu-HU"/>
           </a:p>
@@ -7136,7 +7136,7 @@
           <a:p>
             <a:fld id="{64E71317-EACD-4ACE-B971-84E39F8DD59C}" type="datetimeFigureOut">
               <a:rPr lang="hu-HU" smtClean="0"/>
-              <a:t>2026. 02. 27.</a:t>
+              <a:t>2026. 03. 02.</a:t>
             </a:fld>
             <a:endParaRPr lang="hu-HU"/>
           </a:p>
@@ -7591,7 +7591,7 @@
           <a:p>
             <a:fld id="{64E71317-EACD-4ACE-B971-84E39F8DD59C}" type="datetimeFigureOut">
               <a:rPr lang="hu-HU" smtClean="0"/>
-              <a:t>2026. 02. 27.</a:t>
+              <a:t>2026. 03. 02.</a:t>
             </a:fld>
             <a:endParaRPr lang="hu-HU"/>
           </a:p>
@@ -9967,13 +9967,21 @@
             <p:ph type="title"/>
           </p:nvPr>
         </p:nvSpPr>
-        <p:spPr/>
+        <p:spPr>
+          <a:xfrm>
+            <a:off x="3599623" y="727038"/>
+            <a:ext cx="4721417" cy="1400530"/>
+          </a:xfrm>
+        </p:spPr>
         <p:txBody>
           <a:bodyPr/>
           <a:lstStyle/>
           <a:p>
             <a:r>
-              <a:rPr lang="hu-HU" dirty="0"/>
+              <a:rPr lang="hu-HU" b="1" dirty="0">
+                <a:latin typeface="Times New Roman" panose="02020603050405020304" pitchFamily="18" charset="0"/>
+                <a:cs typeface="Times New Roman" panose="02020603050405020304" pitchFamily="18" charset="0"/>
+              </a:rPr>
               <a:t>Virtuális szerverek</a:t>
             </a:r>
           </a:p>
@@ -9995,97 +10003,150 @@
             <p:ph idx="1"/>
           </p:nvPr>
         </p:nvSpPr>
-        <p:spPr/>
+        <p:spPr>
+          <a:xfrm>
+            <a:off x="1121600" y="2127568"/>
+            <a:ext cx="8946541" cy="4195481"/>
+          </a:xfrm>
+        </p:spPr>
         <p:txBody>
           <a:bodyPr/>
           <a:lstStyle/>
           <a:p>
             <a:r>
-              <a:rPr lang="hu-HU" dirty="0" err="1"/>
+              <a:rPr lang="hu-HU" dirty="0" err="1">
+                <a:latin typeface="Times New Roman" panose="02020603050405020304" pitchFamily="18" charset="0"/>
+                <a:cs typeface="Times New Roman" panose="02020603050405020304" pitchFamily="18" charset="0"/>
+              </a:rPr>
               <a:t>Virtual</a:t>
             </a:r>
             <a:r>
-              <a:rPr lang="hu-HU" dirty="0"/>
+              <a:rPr lang="hu-HU" dirty="0">
+                <a:latin typeface="Times New Roman" panose="02020603050405020304" pitchFamily="18" charset="0"/>
+                <a:cs typeface="Times New Roman" panose="02020603050405020304" pitchFamily="18" charset="0"/>
+              </a:rPr>
               <a:t> </a:t>
             </a:r>
             <a:r>
-              <a:rPr lang="hu-HU" dirty="0" err="1"/>
+              <a:rPr lang="hu-HU" dirty="0" err="1">
+                <a:latin typeface="Times New Roman" panose="02020603050405020304" pitchFamily="18" charset="0"/>
+                <a:cs typeface="Times New Roman" panose="02020603050405020304" pitchFamily="18" charset="0"/>
+              </a:rPr>
               <a:t>boxot</a:t>
             </a:r>
             <a:r>
-              <a:rPr lang="hu-HU" dirty="0"/>
+              <a:rPr lang="hu-HU" dirty="0">
+                <a:latin typeface="Times New Roman" panose="02020603050405020304" pitchFamily="18" charset="0"/>
+                <a:cs typeface="Times New Roman" panose="02020603050405020304" pitchFamily="18" charset="0"/>
+              </a:rPr>
               <a:t> használtunk</a:t>
             </a:r>
           </a:p>
           <a:p>
             <a:pPr lvl="1"/>
             <a:r>
-              <a:rPr lang="hu-HU" dirty="0"/>
+              <a:rPr lang="hu-HU" dirty="0">
+                <a:latin typeface="Times New Roman" panose="02020603050405020304" pitchFamily="18" charset="0"/>
+                <a:cs typeface="Times New Roman" panose="02020603050405020304" pitchFamily="18" charset="0"/>
+              </a:rPr>
               <a:t>Windows 2019</a:t>
             </a:r>
           </a:p>
           <a:p>
             <a:pPr lvl="2"/>
             <a:r>
-              <a:rPr lang="hu-HU" dirty="0" err="1"/>
+              <a:rPr lang="hu-HU" dirty="0" err="1">
+                <a:latin typeface="Times New Roman" panose="02020603050405020304" pitchFamily="18" charset="0"/>
+                <a:cs typeface="Times New Roman" panose="02020603050405020304" pitchFamily="18" charset="0"/>
+              </a:rPr>
               <a:t>Active</a:t>
             </a:r>
             <a:r>
-              <a:rPr lang="hu-HU" dirty="0"/>
+              <a:rPr lang="hu-HU" dirty="0">
+                <a:latin typeface="Times New Roman" panose="02020603050405020304" pitchFamily="18" charset="0"/>
+                <a:cs typeface="Times New Roman" panose="02020603050405020304" pitchFamily="18" charset="0"/>
+              </a:rPr>
               <a:t> </a:t>
             </a:r>
             <a:r>
-              <a:rPr lang="hu-HU" dirty="0" err="1"/>
+              <a:rPr lang="hu-HU" dirty="0" err="1">
+                <a:latin typeface="Times New Roman" panose="02020603050405020304" pitchFamily="18" charset="0"/>
+                <a:cs typeface="Times New Roman" panose="02020603050405020304" pitchFamily="18" charset="0"/>
+              </a:rPr>
               <a:t>Directory</a:t>
             </a:r>
-            <a:endParaRPr lang="hu-HU" dirty="0"/>
+            <a:endParaRPr lang="hu-HU" dirty="0">
+              <a:latin typeface="Times New Roman" panose="02020603050405020304" pitchFamily="18" charset="0"/>
+              <a:cs typeface="Times New Roman" panose="02020603050405020304" pitchFamily="18" charset="0"/>
+            </a:endParaRPr>
           </a:p>
           <a:p>
             <a:pPr lvl="2"/>
             <a:r>
-              <a:rPr lang="hu-HU" dirty="0"/>
+              <a:rPr lang="hu-HU" dirty="0">
+                <a:latin typeface="Times New Roman" panose="02020603050405020304" pitchFamily="18" charset="0"/>
+                <a:cs typeface="Times New Roman" panose="02020603050405020304" pitchFamily="18" charset="0"/>
+              </a:rPr>
               <a:t>DNS szerver</a:t>
             </a:r>
           </a:p>
           <a:p>
             <a:pPr lvl="2"/>
             <a:r>
-              <a:rPr lang="hu-HU" dirty="0"/>
+              <a:rPr lang="hu-HU" dirty="0">
+                <a:latin typeface="Times New Roman" panose="02020603050405020304" pitchFamily="18" charset="0"/>
+                <a:cs typeface="Times New Roman" panose="02020603050405020304" pitchFamily="18" charset="0"/>
+              </a:rPr>
               <a:t>DHCP szerver</a:t>
             </a:r>
           </a:p>
           <a:p>
             <a:pPr lvl="2"/>
             <a:r>
-              <a:rPr lang="hu-HU" dirty="0"/>
+              <a:rPr lang="hu-HU" dirty="0">
+                <a:latin typeface="Times New Roman" panose="02020603050405020304" pitchFamily="18" charset="0"/>
+                <a:cs typeface="Times New Roman" panose="02020603050405020304" pitchFamily="18" charset="0"/>
+              </a:rPr>
               <a:t>HTTP/HTTPS</a:t>
             </a:r>
           </a:p>
           <a:p>
             <a:pPr lvl="2"/>
             <a:r>
-              <a:rPr lang="hu-HU" dirty="0"/>
+              <a:rPr lang="hu-HU" dirty="0">
+                <a:latin typeface="Times New Roman" panose="02020603050405020304" pitchFamily="18" charset="0"/>
+                <a:cs typeface="Times New Roman" panose="02020603050405020304" pitchFamily="18" charset="0"/>
+              </a:rPr>
               <a:t>Nyomtató és fájl megosztás</a:t>
             </a:r>
           </a:p>
           <a:p>
             <a:pPr lvl="2"/>
             <a:r>
-              <a:rPr lang="hu-HU" dirty="0"/>
+              <a:rPr lang="hu-HU" dirty="0">
+                <a:latin typeface="Times New Roman" panose="02020603050405020304" pitchFamily="18" charset="0"/>
+                <a:cs typeface="Times New Roman" panose="02020603050405020304" pitchFamily="18" charset="0"/>
+              </a:rPr>
               <a:t>Automatikus szoftvertelepítés</a:t>
             </a:r>
           </a:p>
           <a:p>
             <a:pPr lvl="1"/>
             <a:r>
-              <a:rPr lang="hu-HU" dirty="0"/>
+              <a:rPr lang="hu-HU" dirty="0">
+                <a:latin typeface="Times New Roman" panose="02020603050405020304" pitchFamily="18" charset="0"/>
+                <a:cs typeface="Times New Roman" panose="02020603050405020304" pitchFamily="18" charset="0"/>
+              </a:rPr>
               <a:t>Linux Debian 2013</a:t>
             </a:r>
           </a:p>
           <a:p>
             <a:pPr lvl="2"/>
             <a:r>
-              <a:rPr lang="hu-HU" dirty="0"/>
+              <a:rPr lang="hu-HU" dirty="0">
+                <a:latin typeface="Times New Roman" panose="02020603050405020304" pitchFamily="18" charset="0"/>
+                <a:cs typeface="Times New Roman" panose="02020603050405020304" pitchFamily="18" charset="0"/>
+              </a:rPr>
               <a:t>Automatizált mentés</a:t>
             </a:r>
           </a:p>

--- a/Kovta_Nyrt_HU.pptx
+++ b/Kovta_Nyrt_HU.pptx
@@ -22,7 +22,7 @@
     <p:sldId id="273" r:id="rId13"/>
     <p:sldId id="263" r:id="rId14"/>
     <p:sldId id="264" r:id="rId15"/>
-    <p:sldId id="265" r:id="rId16"/>
+    <p:sldId id="274" r:id="rId16"/>
     <p:sldId id="272" r:id="rId17"/>
     <p:sldId id="259" r:id="rId18"/>
   </p:sldIdLst>
@@ -1292,7 +1292,34 @@
           <a:p>
             <a:r>
               <a:rPr lang="hu-HU" dirty="0"/>
-              <a:t>Ez az ábra a két csapattag közötti munkamegosztást mutatja be. Igyekeztünk arányosan elosztani a feladatokat – a hálózattervezés, a konfigurálás, a tesztelés és a dokumentáció egyaránt mindkettőnk aktív részvételével zajlott.</a:t>
+              <a:t>A hálózat jelenleg is stabil és funkcionális, de a jövőben számos fejlesztési lehetőség áll előttünk. Először is a második rétegbeli redundanciát szeretnénk kialakítani – ez további switchek beépítését jelenti a kritikus pontokon, Spanning Tree Protocol implementálását a hurokmentesség biztosítására, és alternatív útvonalak kiépítését a rugalmasság növelésére.</a:t>
+            </a:r>
+          </a:p>
+          <a:p>
+            <a:endParaRPr lang="hu-HU" dirty="0"/>
+          </a:p>
+          <a:p>
+            <a:r>
+              <a:rPr lang="hu-HU" dirty="0"/>
+              <a:t>A biztonság terén tervezzük egy IDS/IPS rendszer telepítését, amely képes lesz a behatolási kísérleteket valós időben detektálni és megelőzni. VPN kapcsolatok kialakítása lehetővé teszi majd a távoli, biztonságos hozzáférést, és többfaktoros autentikációt vezetünk be a különösen érzékeny területeken.</a:t>
+            </a:r>
+          </a:p>
+          <a:p>
+            <a:endParaRPr lang="hu-HU" dirty="0"/>
+          </a:p>
+          <a:p>
+            <a:r>
+              <a:rPr lang="hu-HU" dirty="0"/>
+              <a:t>A monitorozás és naplózás fejlesztése is kulcsfontosságú: egy centralizált log szerver segítségével az összes hálózati eseményt egy helyen tudjuk majd nyomon követni. SNMP alapú monitorozással folyamatosan ellenőrizhetjük az eszközök állapotát, és valós idejű riasztási rendszert konfigurálunk a gyors reagálás érdekében.</a:t>
+            </a:r>
+          </a:p>
+          <a:p>
+            <a:endParaRPr lang="hu-HU" dirty="0"/>
+          </a:p>
+          <a:p>
+            <a:r>
+              <a:rPr lang="hu-HU" dirty="0"/>
+              <a:t>Végül a skálázhatóság szempontjából felhő alapú szolgáltatásokat integrálunk, load balancing megoldásokat alkalmazunk a szerverek terhelésének optimalizálására, és kidolgozzuk a hosszú távú kapacitástervezési és bővítési stratégiát.</a:t>
             </a:r>
           </a:p>
         </p:txBody>
@@ -1351,92 +1378,6 @@
           <a:p>
             <a:r>
               <a:rPr lang="hu-HU" dirty="0"/>
-              <a:t>A hálózat jelenleg is stabil és funkcionális, de a jövőben számos fejlesztési lehetőség áll előttünk. Először is a második rétegbeli redundanciát szeretnénk kialakítani – ez további switchek beépítését jelenti a kritikus pontokon, Spanning Tree Protocol implementálását a hurokmentesség biztosítására, és alternatív útvonalak kiépítését a rugalmasság növelésére.</a:t>
-            </a:r>
-          </a:p>
-          <a:p>
-            <a:endParaRPr lang="hu-HU" dirty="0"/>
-          </a:p>
-          <a:p>
-            <a:r>
-              <a:rPr lang="hu-HU" dirty="0"/>
-              <a:t>A biztonság terén tervezzük egy IDS/IPS rendszer telepítését, amely képes lesz a behatolási kísérleteket valós időben detektálni és megelőzni. VPN kapcsolatok kialakítása lehetővé teszi majd a távoli, biztonságos hozzáférést, és többfaktoros autentikációt vezetünk be a különösen érzékeny területeken.</a:t>
-            </a:r>
-          </a:p>
-          <a:p>
-            <a:endParaRPr lang="hu-HU" dirty="0"/>
-          </a:p>
-          <a:p>
-            <a:r>
-              <a:rPr lang="hu-HU" dirty="0"/>
-              <a:t>A monitorozás és naplózás fejlesztése is kulcsfontosságú: egy centralizált log szerver segítségével az összes hálózati eseményt egy helyen tudjuk majd nyomon követni. SNMP alapú monitorozással folyamatosan ellenőrizhetjük az eszközök állapotát, és valós idejű riasztási rendszert konfigurálunk a gyors reagálás érdekében.</a:t>
-            </a:r>
-          </a:p>
-          <a:p>
-            <a:endParaRPr lang="hu-HU" dirty="0"/>
-          </a:p>
-          <a:p>
-            <a:r>
-              <a:rPr lang="hu-HU" dirty="0"/>
-              <a:t>Végül a skálázhatóság szempontjából felhő alapú szolgáltatásokat integrálunk, load balancing megoldásokat alkalmazunk a szerverek terhelésének optimalizálására, és kidolgozzuk a hosszú távú kapacitástervezési és bővítési stratégiát.</a:t>
-            </a:r>
-          </a:p>
-        </p:txBody>
-      </p:sp>
-    </p:spTree>
-  </p:cSld>
-  <p:clrMapOvr>
-    <a:masterClrMapping/>
-  </p:clrMapOvr>
-</p:notes>
-</file>
-
-<file path=ppt/notesSlides/notesSlide16.xml><?xml version="1.0" encoding="utf-8"?>
-<p:notes xmlns:a="http://schemas.openxmlformats.org/drawingml/2006/main" xmlns:r="http://schemas.openxmlformats.org/officeDocument/2006/relationships" xmlns:p="http://schemas.openxmlformats.org/presentationml/2006/main">
-  <p:cSld>
-    <p:spTree>
-      <p:nvGrpSpPr>
-        <p:cNvPr id="1" name=""/>
-        <p:cNvGrpSpPr/>
-        <p:nvPr/>
-      </p:nvGrpSpPr>
-      <p:grpSpPr>
-        <a:xfrm>
-          <a:off x="0" y="0"/>
-          <a:ext cx="0" cy="0"/>
-          <a:chOff x="0" y="0"/>
-          <a:chExt cx="0" cy="0"/>
-        </a:xfrm>
-      </p:grpSpPr>
-      <p:sp>
-        <p:nvSpPr>
-          <p:cNvPr id="2" name="Slide Image Placeholder 1"/>
-          <p:cNvSpPr>
-            <a:spLocks noGrp="1" noRot="1" noChangeAspect="1"/>
-          </p:cNvSpPr>
-          <p:nvPr>
-            <p:ph type="sldImg"/>
-          </p:nvPr>
-        </p:nvSpPr>
-        <p:spPr/>
-      </p:sp>
-      <p:sp>
-        <p:nvSpPr>
-          <p:cNvPr id="3" name="Notes Placeholder 2"/>
-          <p:cNvSpPr>
-            <a:spLocks noGrp="1"/>
-          </p:cNvSpPr>
-          <p:nvPr>
-            <p:ph type="body" idx="1"/>
-          </p:nvPr>
-        </p:nvSpPr>
-        <p:spPr/>
-        <p:txBody>
-          <a:bodyPr/>
-          <a:lstStyle/>
-          <a:p>
-            <a:r>
-              <a:rPr lang="hu-HU" dirty="0"/>
               <a:t>Ezzel bemutatónk végéhez értünk. Köszönjük a figyelmet! Ha bármilyen kérdés merülne fel a hálózat felépítésével, a protokollokkal vagy a megvalósítás részleteivel kapcsolatban, szívesen válaszolunk.</a:t>
             </a:r>
           </a:p>
@@ -2108,7 +2049,7 @@
           <a:p>
             <a:fld id="{64E71317-EACD-4ACE-B971-84E39F8DD59C}" type="datetimeFigureOut">
               <a:rPr lang="hu-HU" smtClean="0"/>
-              <a:t>2026. 03. 02.</a:t>
+              <a:t>2026. 03. 03.</a:t>
             </a:fld>
             <a:endParaRPr lang="hu-HU"/>
           </a:p>
@@ -2395,7 +2336,7 @@
           <a:p>
             <a:fld id="{64E71317-EACD-4ACE-B971-84E39F8DD59C}" type="datetimeFigureOut">
               <a:rPr lang="hu-HU" smtClean="0"/>
-              <a:t>2026. 03. 02.</a:t>
+              <a:t>2026. 03. 03.</a:t>
             </a:fld>
             <a:endParaRPr lang="hu-HU"/>
           </a:p>
@@ -2601,7 +2542,7 @@
           <a:p>
             <a:fld id="{64E71317-EACD-4ACE-B971-84E39F8DD59C}" type="datetimeFigureOut">
               <a:rPr lang="hu-HU" smtClean="0"/>
-              <a:t>2026. 03. 02.</a:t>
+              <a:t>2026. 03. 03.</a:t>
             </a:fld>
             <a:endParaRPr lang="hu-HU"/>
           </a:p>
@@ -2886,7 +2827,7 @@
           <a:p>
             <a:fld id="{64E71317-EACD-4ACE-B971-84E39F8DD59C}" type="datetimeFigureOut">
               <a:rPr lang="hu-HU" smtClean="0"/>
-              <a:t>2026. 03. 02.</a:t>
+              <a:t>2026. 03. 03.</a:t>
             </a:fld>
             <a:endParaRPr lang="hu-HU"/>
           </a:p>
@@ -3239,7 +3180,7 @@
           <a:p>
             <a:fld id="{64E71317-EACD-4ACE-B971-84E39F8DD59C}" type="datetimeFigureOut">
               <a:rPr lang="hu-HU" smtClean="0"/>
-              <a:t>2026. 03. 02.</a:t>
+              <a:t>2026. 03. 03.</a:t>
             </a:fld>
             <a:endParaRPr lang="hu-HU"/>
           </a:p>
@@ -3874,7 +3815,7 @@
           <a:p>
             <a:fld id="{64E71317-EACD-4ACE-B971-84E39F8DD59C}" type="datetimeFigureOut">
               <a:rPr lang="hu-HU" smtClean="0"/>
-              <a:t>2026. 03. 02.</a:t>
+              <a:t>2026. 03. 03.</a:t>
             </a:fld>
             <a:endParaRPr lang="hu-HU"/>
           </a:p>
@@ -4746,7 +4687,7 @@
           <a:p>
             <a:fld id="{64E71317-EACD-4ACE-B971-84E39F8DD59C}" type="datetimeFigureOut">
               <a:rPr lang="hu-HU" smtClean="0"/>
-              <a:t>2026. 03. 02.</a:t>
+              <a:t>2026. 03. 03.</a:t>
             </a:fld>
             <a:endParaRPr lang="hu-HU"/>
           </a:p>
@@ -4928,7 +4869,7 @@
           <a:p>
             <a:fld id="{64E71317-EACD-4ACE-B971-84E39F8DD59C}" type="datetimeFigureOut">
               <a:rPr lang="hu-HU" smtClean="0"/>
-              <a:t>2026. 03. 02.</a:t>
+              <a:t>2026. 03. 03.</a:t>
             </a:fld>
             <a:endParaRPr lang="hu-HU"/>
           </a:p>
@@ -5120,7 +5061,7 @@
           <a:p>
             <a:fld id="{64E71317-EACD-4ACE-B971-84E39F8DD59C}" type="datetimeFigureOut">
               <a:rPr lang="hu-HU" smtClean="0"/>
-              <a:t>2026. 03. 02.</a:t>
+              <a:t>2026. 03. 03.</a:t>
             </a:fld>
             <a:endParaRPr lang="hu-HU"/>
           </a:p>
@@ -5302,7 +5243,7 @@
           <a:p>
             <a:fld id="{64E71317-EACD-4ACE-B971-84E39F8DD59C}" type="datetimeFigureOut">
               <a:rPr lang="hu-HU" smtClean="0"/>
-              <a:t>2026. 03. 02.</a:t>
+              <a:t>2026. 03. 03.</a:t>
             </a:fld>
             <a:endParaRPr lang="hu-HU"/>
           </a:p>
@@ -5561,7 +5502,7 @@
           <a:p>
             <a:fld id="{64E71317-EACD-4ACE-B971-84E39F8DD59C}" type="datetimeFigureOut">
               <a:rPr lang="hu-HU" smtClean="0"/>
-              <a:t>2026. 03. 02.</a:t>
+              <a:t>2026. 03. 03.</a:t>
             </a:fld>
             <a:endParaRPr lang="hu-HU"/>
           </a:p>
@@ -5865,7 +5806,7 @@
           <a:p>
             <a:fld id="{64E71317-EACD-4ACE-B971-84E39F8DD59C}" type="datetimeFigureOut">
               <a:rPr lang="hu-HU" smtClean="0"/>
-              <a:t>2026. 03. 02.</a:t>
+              <a:t>2026. 03. 03.</a:t>
             </a:fld>
             <a:endParaRPr lang="hu-HU"/>
           </a:p>
@@ -6321,7 +6262,7 @@
           <a:p>
             <a:fld id="{64E71317-EACD-4ACE-B971-84E39F8DD59C}" type="datetimeFigureOut">
               <a:rPr lang="hu-HU" smtClean="0"/>
-              <a:t>2026. 03. 02.</a:t>
+              <a:t>2026. 03. 03.</a:t>
             </a:fld>
             <a:endParaRPr lang="hu-HU"/>
           </a:p>
@@ -6451,7 +6392,7 @@
           <a:p>
             <a:fld id="{64E71317-EACD-4ACE-B971-84E39F8DD59C}" type="datetimeFigureOut">
               <a:rPr lang="hu-HU" smtClean="0"/>
-              <a:t>2026. 03. 02.</a:t>
+              <a:t>2026. 03. 03.</a:t>
             </a:fld>
             <a:endParaRPr lang="hu-HU"/>
           </a:p>
@@ -6558,7 +6499,7 @@
           <a:p>
             <a:fld id="{64E71317-EACD-4ACE-B971-84E39F8DD59C}" type="datetimeFigureOut">
               <a:rPr lang="hu-HU" smtClean="0"/>
-              <a:t>2026. 03. 02.</a:t>
+              <a:t>2026. 03. 03.</a:t>
             </a:fld>
             <a:endParaRPr lang="hu-HU"/>
           </a:p>
@@ -6849,7 +6790,7 @@
           <a:p>
             <a:fld id="{64E71317-EACD-4ACE-B971-84E39F8DD59C}" type="datetimeFigureOut">
               <a:rPr lang="hu-HU" smtClean="0"/>
-              <a:t>2026. 03. 02.</a:t>
+              <a:t>2026. 03. 03.</a:t>
             </a:fld>
             <a:endParaRPr lang="hu-HU"/>
           </a:p>
@@ -7136,7 +7077,7 @@
           <a:p>
             <a:fld id="{64E71317-EACD-4ACE-B971-84E39F8DD59C}" type="datetimeFigureOut">
               <a:rPr lang="hu-HU" smtClean="0"/>
-              <a:t>2026. 03. 02.</a:t>
+              <a:t>2026. 03. 03.</a:t>
             </a:fld>
             <a:endParaRPr lang="hu-HU"/>
           </a:p>
@@ -7591,7 +7532,7 @@
           <a:p>
             <a:fld id="{64E71317-EACD-4ACE-B971-84E39F8DD59C}" type="datetimeFigureOut">
               <a:rPr lang="hu-HU" smtClean="0"/>
-              <a:t>2026. 03. 02.</a:t>
+              <a:t>2026. 03. 03.</a:t>
             </a:fld>
             <a:endParaRPr lang="hu-HU"/>
           </a:p>
@@ -8117,6 +8058,30 @@
 <file path=ppt/slides/slide1.xml><?xml version="1.0" encoding="utf-8"?>
 <p:sld xmlns:a="http://schemas.openxmlformats.org/drawingml/2006/main" xmlns:r="http://schemas.openxmlformats.org/officeDocument/2006/relationships" xmlns:p="http://schemas.openxmlformats.org/presentationml/2006/main">
   <p:cSld>
+    <p:bg>
+      <p:bgPr>
+        <a:blipFill rotWithShape="1">
+          <a:blip r:embed="rId3">
+            <a:duotone>
+              <a:schemeClr val="bg2">
+                <a:shade val="69000"/>
+                <a:hueMod val="108000"/>
+                <a:satMod val="164000"/>
+                <a:lumMod val="74000"/>
+              </a:schemeClr>
+              <a:schemeClr val="bg2">
+                <a:tint val="96000"/>
+                <a:hueMod val="88000"/>
+                <a:satMod val="140000"/>
+                <a:lumMod val="132000"/>
+              </a:schemeClr>
+            </a:duotone>
+          </a:blip>
+          <a:stretch/>
+        </a:blipFill>
+        <a:effectLst/>
+      </p:bgPr>
+    </p:bg>
     <p:spTree>
       <p:nvGrpSpPr>
         <p:cNvPr id="1" name=""/>
@@ -8131,6 +8096,250 @@
           <a:chExt cx="0" cy="0"/>
         </a:xfrm>
       </p:grpSpPr>
+      <p:sp useBgFill="1">
+        <p:nvSpPr>
+          <p:cNvPr id="23" name="Rectangle 22">
+            <a:extLst>
+              <a:ext uri="{FF2B5EF4-FFF2-40B4-BE49-F238E27FC236}">
+                <a16:creationId xmlns:a16="http://schemas.microsoft.com/office/drawing/2014/main" id="{859FEF9A-9073-4D0C-AE3F-4B05B7C78A93}"/>
+              </a:ext>
+              <a:ext uri="{C183D7F6-B498-43B3-948B-1728B52AA6E4}">
+                <adec:decorative xmlns:adec="http://schemas.microsoft.com/office/drawing/2017/decorative" val="1"/>
+              </a:ext>
+            </a:extLst>
+          </p:cNvPr>
+          <p:cNvSpPr>
+            <a:spLocks noGrp="1" noRot="1" noChangeAspect="1" noMove="1" noResize="1" noEditPoints="1" noAdjustHandles="1" noChangeArrowheads="1" noChangeShapeType="1" noTextEdit="1"/>
+          </p:cNvSpPr>
+          <p:nvPr>
+            <p:extLst>
+              <p:ext uri="{386F3935-93C4-4BCD-93E2-E3B085C9AB24}">
+                <p16:designElem xmlns:p16="http://schemas.microsoft.com/office/powerpoint/2015/main" val="1"/>
+              </p:ext>
+            </p:extLst>
+          </p:nvPr>
+        </p:nvSpPr>
+        <p:spPr>
+          <a:xfrm>
+            <a:off x="0" y="0"/>
+            <a:ext cx="12188952" cy="6858000"/>
+          </a:xfrm>
+          <a:prstGeom prst="rect">
+            <a:avLst/>
+          </a:prstGeom>
+          <a:ln>
+            <a:noFill/>
+          </a:ln>
+        </p:spPr>
+        <p:style>
+          <a:lnRef idx="2">
+            <a:schemeClr val="accent1">
+              <a:shade val="50000"/>
+            </a:schemeClr>
+          </a:lnRef>
+          <a:fillRef idx="1">
+            <a:schemeClr val="accent1"/>
+          </a:fillRef>
+          <a:effectRef idx="0">
+            <a:schemeClr val="accent1"/>
+          </a:effectRef>
+          <a:fontRef idx="minor">
+            <a:schemeClr val="lt1"/>
+          </a:fontRef>
+        </p:style>
+        <p:txBody>
+          <a:bodyPr rtlCol="0" anchor="ctr"/>
+          <a:lstStyle/>
+          <a:p>
+            <a:pPr algn="ctr"/>
+            <a:endParaRPr lang="en-US"/>
+          </a:p>
+        </p:txBody>
+      </p:sp>
+      <p:sp>
+        <p:nvSpPr>
+          <p:cNvPr id="25" name="Freeform 5">
+            <a:extLst>
+              <a:ext uri="{FF2B5EF4-FFF2-40B4-BE49-F238E27FC236}">
+                <a16:creationId xmlns:a16="http://schemas.microsoft.com/office/drawing/2014/main" id="{9A868E46-760C-4803-96E3-94D7FF55D339}"/>
+              </a:ext>
+              <a:ext uri="{C183D7F6-B498-43B3-948B-1728B52AA6E4}">
+                <adec:decorative xmlns:adec="http://schemas.microsoft.com/office/drawing/2017/decorative" val="1"/>
+              </a:ext>
+            </a:extLst>
+          </p:cNvPr>
+          <p:cNvSpPr>
+            <a:spLocks noGrp="1" noRot="1" noChangeAspect="1" noMove="1" noResize="1" noEditPoints="1" noAdjustHandles="1" noChangeArrowheads="1" noChangeShapeType="1" noTextEdit="1"/>
+          </p:cNvSpPr>
+          <p:nvPr>
+            <p:extLst>
+              <p:ext uri="{386F3935-93C4-4BCD-93E2-E3B085C9AB24}">
+                <p16:designElem xmlns:p16="http://schemas.microsoft.com/office/powerpoint/2015/main" val="1"/>
+              </p:ext>
+            </p:extLst>
+          </p:nvPr>
+        </p:nvSpPr>
+        <p:spPr bwMode="gray">
+          <a:xfrm>
+            <a:off x="-1588" y="0"/>
+            <a:ext cx="12192000" cy="6856413"/>
+          </a:xfrm>
+          <a:custGeom>
+            <a:avLst/>
+            <a:gdLst/>
+            <a:ahLst/>
+            <a:cxnLst/>
+            <a:rect l="0" t="0" r="r" b="b"/>
+            <a:pathLst>
+              <a:path w="15356" h="8638">
+                <a:moveTo>
+                  <a:pt x="0" y="0"/>
+                </a:moveTo>
+                <a:lnTo>
+                  <a:pt x="0" y="8638"/>
+                </a:lnTo>
+                <a:lnTo>
+                  <a:pt x="15356" y="8638"/>
+                </a:lnTo>
+                <a:lnTo>
+                  <a:pt x="15356" y="0"/>
+                </a:lnTo>
+                <a:lnTo>
+                  <a:pt x="0" y="0"/>
+                </a:lnTo>
+                <a:close/>
+                <a:moveTo>
+                  <a:pt x="14748" y="8038"/>
+                </a:moveTo>
+                <a:lnTo>
+                  <a:pt x="600" y="8038"/>
+                </a:lnTo>
+                <a:lnTo>
+                  <a:pt x="600" y="592"/>
+                </a:lnTo>
+                <a:lnTo>
+                  <a:pt x="14748" y="592"/>
+                </a:lnTo>
+                <a:lnTo>
+                  <a:pt x="14748" y="8038"/>
+                </a:lnTo>
+                <a:close/>
+              </a:path>
+            </a:pathLst>
+          </a:custGeom>
+          <a:solidFill>
+            <a:schemeClr val="tx1"/>
+          </a:solidFill>
+          <a:ln>
+            <a:noFill/>
+          </a:ln>
+        </p:spPr>
+        <p:txBody>
+          <a:bodyPr/>
+          <a:lstStyle/>
+          <a:p>
+            <a:endParaRPr lang="hu-HU"/>
+          </a:p>
+        </p:txBody>
+      </p:sp>
+      <p:sp>
+        <p:nvSpPr>
+          <p:cNvPr id="3" name="Alcím 2">
+            <a:extLst>
+              <a:ext uri="{FF2B5EF4-FFF2-40B4-BE49-F238E27FC236}">
+                <a16:creationId xmlns:a16="http://schemas.microsoft.com/office/drawing/2014/main" id="{F0FC7F3D-D4B1-CD9B-5373-5C3F3FB25FB0}"/>
+              </a:ext>
+            </a:extLst>
+          </p:cNvPr>
+          <p:cNvSpPr>
+            <a:spLocks noGrp="1"/>
+          </p:cNvSpPr>
+          <p:nvPr>
+            <p:ph type="subTitle" idx="1"/>
+          </p:nvPr>
+        </p:nvSpPr>
+        <p:spPr>
+          <a:xfrm>
+            <a:off x="1154955" y="1333500"/>
+            <a:ext cx="2914380" cy="4191000"/>
+          </a:xfrm>
+        </p:spPr>
+        <p:txBody>
+          <a:bodyPr anchor="ctr">
+            <a:normAutofit/>
+          </a:bodyPr>
+          <a:lstStyle/>
+          <a:p>
+            <a:pPr algn="r"/>
+            <a:r>
+              <a:rPr lang="hu-HU">
+                <a:solidFill>
+                  <a:schemeClr val="tx1"/>
+                </a:solidFill>
+                <a:latin typeface="Times New Roman"/>
+                <a:cs typeface="Times New Roman"/>
+              </a:rPr>
+              <a:t>Készítette: SysTeam (Bánkuti Bálint, Szőke Kristóf)</a:t>
+            </a:r>
+          </a:p>
+        </p:txBody>
+      </p:sp>
+      <p:cxnSp>
+        <p:nvCxnSpPr>
+          <p:cNvPr id="27" name="Straight Connector 26">
+            <a:extLst>
+              <a:ext uri="{FF2B5EF4-FFF2-40B4-BE49-F238E27FC236}">
+                <a16:creationId xmlns:a16="http://schemas.microsoft.com/office/drawing/2014/main" id="{C632DB3C-29C8-435B-832E-2A00033193CD}"/>
+              </a:ext>
+              <a:ext uri="{C183D7F6-B498-43B3-948B-1728B52AA6E4}">
+                <adec:decorative xmlns:adec="http://schemas.microsoft.com/office/drawing/2017/decorative" val="1"/>
+              </a:ext>
+            </a:extLst>
+          </p:cNvPr>
+          <p:cNvCxnSpPr>
+            <a:cxnSpLocks noGrp="1" noRot="1" noChangeAspect="1" noMove="1" noResize="1" noEditPoints="1" noAdjustHandles="1" noChangeArrowheads="1" noChangeShapeType="1"/>
+          </p:cNvCxnSpPr>
+          <p:nvPr>
+            <p:extLst>
+              <p:ext uri="{386F3935-93C4-4BCD-93E2-E3B085C9AB24}">
+                <p16:designElem xmlns:p16="http://schemas.microsoft.com/office/powerpoint/2015/main" val="1"/>
+              </p:ext>
+            </p:extLst>
+          </p:nvPr>
+        </p:nvCxnSpPr>
+        <p:spPr>
+          <a:xfrm>
+            <a:off x="4361021" y="1828800"/>
+            <a:ext cx="0" cy="3200400"/>
+          </a:xfrm>
+          <a:prstGeom prst="line">
+            <a:avLst/>
+          </a:prstGeom>
+          <a:ln w="19050" cap="sq">
+            <a:solidFill>
+              <a:schemeClr val="bg2">
+                <a:lumMod val="60000"/>
+                <a:lumOff val="40000"/>
+              </a:schemeClr>
+            </a:solidFill>
+            <a:miter lim="800000"/>
+          </a:ln>
+        </p:spPr>
+        <p:style>
+          <a:lnRef idx="1">
+            <a:schemeClr val="accent1"/>
+          </a:lnRef>
+          <a:fillRef idx="0">
+            <a:schemeClr val="accent1"/>
+          </a:fillRef>
+          <a:effectRef idx="0">
+            <a:schemeClr val="accent1"/>
+          </a:effectRef>
+          <a:fontRef idx="minor">
+            <a:schemeClr val="tx1"/>
+          </a:fontRef>
+        </p:style>
+      </p:cxnSp>
       <p:sp>
         <p:nvSpPr>
           <p:cNvPr id="2" name="Cím 1">
@@ -8147,9 +8356,16 @@
             <p:ph type="ctrTitle"/>
           </p:nvPr>
         </p:nvSpPr>
-        <p:spPr/>
+        <p:spPr>
+          <a:xfrm>
+            <a:off x="4652707" y="1333500"/>
+            <a:ext cx="6240580" cy="4191000"/>
+          </a:xfrm>
+        </p:spPr>
         <p:txBody>
-          <a:bodyPr/>
+          <a:bodyPr anchor="ctr">
+            <a:normAutofit/>
+          </a:bodyPr>
           <a:lstStyle/>
           <a:p>
             <a:r>
@@ -8165,51 +8381,6 @@
                 <a:cs typeface="Times New Roman" panose="02020603050405020304" pitchFamily="18" charset="0"/>
               </a:rPr>
               <a:t> Nyrt.</a:t>
-            </a:r>
-          </a:p>
-        </p:txBody>
-      </p:sp>
-      <p:sp>
-        <p:nvSpPr>
-          <p:cNvPr id="3" name="Alcím 2">
-            <a:extLst>
-              <a:ext uri="{FF2B5EF4-FFF2-40B4-BE49-F238E27FC236}">
-                <a16:creationId xmlns:a16="http://schemas.microsoft.com/office/drawing/2014/main" id="{F0FC7F3D-D4B1-CD9B-5373-5C3F3FB25FB0}"/>
-              </a:ext>
-            </a:extLst>
-          </p:cNvPr>
-          <p:cNvSpPr>
-            <a:spLocks noGrp="1"/>
-          </p:cNvSpPr>
-          <p:nvPr>
-            <p:ph type="subTitle" idx="1"/>
-          </p:nvPr>
-        </p:nvSpPr>
-        <p:spPr/>
-        <p:txBody>
-          <a:bodyPr/>
-          <a:lstStyle/>
-          <a:p>
-            <a:r>
-              <a:rPr lang="hu-HU" dirty="0">
-                <a:latin typeface="Times New Roman"/>
-                <a:cs typeface="Times New Roman"/>
-              </a:rPr>
-              <a:t>Készítette: </a:t>
-            </a:r>
-            <a:r>
-              <a:rPr lang="hu-HU" dirty="0" err="1">
-                <a:latin typeface="Times New Roman"/>
-                <a:cs typeface="Times New Roman"/>
-              </a:rPr>
-              <a:t>SysTeam</a:t>
-            </a:r>
-            <a:r>
-              <a:rPr lang="hu-HU" dirty="0">
-                <a:latin typeface="Times New Roman"/>
-                <a:cs typeface="Times New Roman"/>
-              </a:rPr>
-              <a:t> (Bánkuti Bálint, Szőke Kristóf)</a:t>
             </a:r>
           </a:p>
         </p:txBody>
@@ -9937,6 +10108,30 @@
 <file path=ppt/slides/slide12.xml><?xml version="1.0" encoding="utf-8"?>
 <p:sld xmlns:a="http://schemas.openxmlformats.org/drawingml/2006/main" xmlns:r="http://schemas.openxmlformats.org/officeDocument/2006/relationships" xmlns:p="http://schemas.openxmlformats.org/presentationml/2006/main">
   <p:cSld>
+    <p:bg>
+      <p:bgPr>
+        <a:blipFill rotWithShape="1">
+          <a:blip r:embed="rId2">
+            <a:duotone>
+              <a:schemeClr val="bg2">
+                <a:shade val="69000"/>
+                <a:hueMod val="108000"/>
+                <a:satMod val="164000"/>
+                <a:lumMod val="74000"/>
+              </a:schemeClr>
+              <a:schemeClr val="bg2">
+                <a:tint val="96000"/>
+                <a:hueMod val="88000"/>
+                <a:satMod val="140000"/>
+                <a:lumMod val="132000"/>
+              </a:schemeClr>
+            </a:duotone>
+          </a:blip>
+          <a:stretch/>
+        </a:blipFill>
+        <a:effectLst/>
+      </p:bgPr>
+    </p:bg>
     <p:spTree>
       <p:nvGrpSpPr>
         <p:cNvPr id="1" name=""/>
@@ -9953,6 +10148,314 @@
       </p:grpSpPr>
       <p:sp>
         <p:nvSpPr>
+          <p:cNvPr id="8" name="Rectangle 7">
+            <a:extLst>
+              <a:ext uri="{FF2B5EF4-FFF2-40B4-BE49-F238E27FC236}">
+                <a16:creationId xmlns:a16="http://schemas.microsoft.com/office/drawing/2014/main" id="{923E8915-D2AA-4327-A45A-972C3CA9574B}"/>
+              </a:ext>
+              <a:ext uri="{C183D7F6-B498-43B3-948B-1728B52AA6E4}">
+                <adec:decorative xmlns:adec="http://schemas.microsoft.com/office/drawing/2017/decorative" val="1"/>
+              </a:ext>
+            </a:extLst>
+          </p:cNvPr>
+          <p:cNvSpPr>
+            <a:spLocks noGrp="1" noRot="1" noChangeAspect="1" noMove="1" noResize="1" noEditPoints="1" noAdjustHandles="1" noChangeArrowheads="1" noChangeShapeType="1" noTextEdit="1"/>
+          </p:cNvSpPr>
+          <p:nvPr>
+            <p:extLst>
+              <p:ext uri="{386F3935-93C4-4BCD-93E2-E3B085C9AB24}">
+                <p16:designElem xmlns:p16="http://schemas.microsoft.com/office/powerpoint/2015/main" val="1"/>
+              </p:ext>
+            </p:extLst>
+          </p:nvPr>
+        </p:nvSpPr>
+        <p:spPr>
+          <a:xfrm>
+            <a:off x="0" y="0"/>
+            <a:ext cx="12192000" cy="6858000"/>
+          </a:xfrm>
+          <a:prstGeom prst="rect">
+            <a:avLst/>
+          </a:prstGeom>
+          <a:solidFill>
+            <a:schemeClr val="tx1"/>
+          </a:solidFill>
+          <a:ln>
+            <a:noFill/>
+          </a:ln>
+        </p:spPr>
+        <p:style>
+          <a:lnRef idx="2">
+            <a:schemeClr val="accent1">
+              <a:shade val="50000"/>
+            </a:schemeClr>
+          </a:lnRef>
+          <a:fillRef idx="1">
+            <a:schemeClr val="accent1"/>
+          </a:fillRef>
+          <a:effectRef idx="0">
+            <a:schemeClr val="accent1"/>
+          </a:effectRef>
+          <a:fontRef idx="minor">
+            <a:schemeClr val="lt1"/>
+          </a:fontRef>
+        </p:style>
+        <p:txBody>
+          <a:bodyPr rtlCol="0" anchor="ctr"/>
+          <a:lstStyle/>
+          <a:p>
+            <a:pPr algn="ctr"/>
+            <a:endParaRPr lang="en-US"/>
+          </a:p>
+        </p:txBody>
+      </p:sp>
+      <p:sp useBgFill="1">
+        <p:nvSpPr>
+          <p:cNvPr id="10" name="Rectangle 9">
+            <a:extLst>
+              <a:ext uri="{FF2B5EF4-FFF2-40B4-BE49-F238E27FC236}">
+                <a16:creationId xmlns:a16="http://schemas.microsoft.com/office/drawing/2014/main" id="{8302FC3C-9804-4950-B721-5FD704BA6065}"/>
+              </a:ext>
+              <a:ext uri="{C183D7F6-B498-43B3-948B-1728B52AA6E4}">
+                <adec:decorative xmlns:adec="http://schemas.microsoft.com/office/drawing/2017/decorative" val="1"/>
+              </a:ext>
+            </a:extLst>
+          </p:cNvPr>
+          <p:cNvSpPr>
+            <a:spLocks noGrp="1" noRot="1" noChangeAspect="1" noMove="1" noResize="1" noEditPoints="1" noAdjustHandles="1" noChangeArrowheads="1" noChangeShapeType="1" noTextEdit="1"/>
+          </p:cNvSpPr>
+          <p:nvPr>
+            <p:extLst>
+              <p:ext uri="{386F3935-93C4-4BCD-93E2-E3B085C9AB24}">
+                <p16:designElem xmlns:p16="http://schemas.microsoft.com/office/powerpoint/2015/main" val="1"/>
+              </p:ext>
+            </p:extLst>
+          </p:nvPr>
+        </p:nvSpPr>
+        <p:spPr bwMode="ltGray">
+          <a:xfrm>
+            <a:off x="0" y="0"/>
+            <a:ext cx="12188952" cy="6858000"/>
+          </a:xfrm>
+          <a:prstGeom prst="rect">
+            <a:avLst/>
+          </a:prstGeom>
+          <a:ln w="127000" cap="sq" cmpd="thinThick">
+            <a:noFill/>
+          </a:ln>
+        </p:spPr>
+        <p:style>
+          <a:lnRef idx="2">
+            <a:schemeClr val="accent1">
+              <a:shade val="50000"/>
+            </a:schemeClr>
+          </a:lnRef>
+          <a:fillRef idx="1">
+            <a:schemeClr val="accent1"/>
+          </a:fillRef>
+          <a:effectRef idx="0">
+            <a:schemeClr val="accent1"/>
+          </a:effectRef>
+          <a:fontRef idx="minor">
+            <a:schemeClr val="lt1"/>
+          </a:fontRef>
+        </p:style>
+        <p:txBody>
+          <a:bodyPr rtlCol="0" anchor="ctr"/>
+          <a:lstStyle/>
+          <a:p>
+            <a:pPr algn="ctr"/>
+            <a:endParaRPr lang="en-US"/>
+          </a:p>
+        </p:txBody>
+      </p:sp>
+      <p:cxnSp>
+        <p:nvCxnSpPr>
+          <p:cNvPr id="12" name="Straight Connector 11">
+            <a:extLst>
+              <a:ext uri="{FF2B5EF4-FFF2-40B4-BE49-F238E27FC236}">
+                <a16:creationId xmlns:a16="http://schemas.microsoft.com/office/drawing/2014/main" id="{6B9695BD-ECF6-49CA-8877-8C493193C65D}"/>
+              </a:ext>
+              <a:ext uri="{C183D7F6-B498-43B3-948B-1728B52AA6E4}">
+                <adec:decorative xmlns:adec="http://schemas.microsoft.com/office/drawing/2017/decorative" val="1"/>
+              </a:ext>
+            </a:extLst>
+          </p:cNvPr>
+          <p:cNvCxnSpPr>
+            <a:cxnSpLocks noGrp="1" noRot="1" noChangeAspect="1" noMove="1" noResize="1" noEditPoints="1" noAdjustHandles="1" noChangeArrowheads="1" noChangeShapeType="1"/>
+          </p:cNvCxnSpPr>
+          <p:nvPr>
+            <p:extLst>
+              <p:ext uri="{386F3935-93C4-4BCD-93E2-E3B085C9AB24}">
+                <p16:designElem xmlns:p16="http://schemas.microsoft.com/office/powerpoint/2015/main" val="1"/>
+              </p:ext>
+            </p:extLst>
+          </p:nvPr>
+        </p:nvCxnSpPr>
+        <p:spPr>
+          <a:xfrm>
+            <a:off x="4654295" y="1828800"/>
+            <a:ext cx="0" cy="3200400"/>
+          </a:xfrm>
+          <a:prstGeom prst="line">
+            <a:avLst/>
+          </a:prstGeom>
+          <a:ln w="19050">
+            <a:solidFill>
+              <a:schemeClr val="bg2">
+                <a:lumMod val="60000"/>
+                <a:lumOff val="40000"/>
+              </a:schemeClr>
+            </a:solidFill>
+          </a:ln>
+        </p:spPr>
+        <p:style>
+          <a:lnRef idx="1">
+            <a:schemeClr val="accent1"/>
+          </a:lnRef>
+          <a:fillRef idx="0">
+            <a:schemeClr val="accent1"/>
+          </a:fillRef>
+          <a:effectRef idx="0">
+            <a:schemeClr val="accent1"/>
+          </a:effectRef>
+          <a:fontRef idx="minor">
+            <a:schemeClr val="tx1"/>
+          </a:fontRef>
+        </p:style>
+      </p:cxnSp>
+      <p:pic>
+        <p:nvPicPr>
+          <p:cNvPr id="14" name="Picture 13">
+            <a:extLst>
+              <a:ext uri="{FF2B5EF4-FFF2-40B4-BE49-F238E27FC236}">
+                <a16:creationId xmlns:a16="http://schemas.microsoft.com/office/drawing/2014/main" id="{3BC6EBB2-9BDC-4075-BA6B-43A9FBF9C86C}"/>
+              </a:ext>
+              <a:ext uri="{C183D7F6-B498-43B3-948B-1728B52AA6E4}">
+                <adec:decorative xmlns:adec="http://schemas.microsoft.com/office/drawing/2017/decorative" val="1"/>
+              </a:ext>
+            </a:extLst>
+          </p:cNvPr>
+          <p:cNvPicPr>
+            <a:picLocks noGrp="1" noRot="1" noChangeAspect="1" noMove="1" noResize="1" noEditPoints="1" noAdjustHandles="1" noChangeArrowheads="1" noChangeShapeType="1" noCrop="1"/>
+          </p:cNvPicPr>
+          <p:nvPr>
+            <p:extLst>
+              <p:ext uri="{386F3935-93C4-4BCD-93E2-E3B085C9AB24}">
+                <p16:designElem xmlns:p16="http://schemas.microsoft.com/office/powerpoint/2015/main" val="1"/>
+              </p:ext>
+            </p:extLst>
+          </p:nvPr>
+        </p:nvPicPr>
+        <p:blipFill rotWithShape="1">
+          <a:blip r:embed="rId3">
+            <a:extLst>
+              <a:ext uri="{28A0092B-C50C-407E-A947-70E740481C1C}">
+                <a14:useLocalDpi xmlns:a14="http://schemas.microsoft.com/office/drawing/2010/main" val="0"/>
+              </a:ext>
+            </a:extLst>
+          </a:blip>
+          <a:srcRect b="23320"/>
+          <a:stretch/>
+        </p:blipFill>
+        <p:spPr>
+          <a:xfrm>
+            <a:off x="8605878" y="6228080"/>
+            <a:ext cx="993734" cy="762000"/>
+          </a:xfrm>
+          <a:prstGeom prst="rect">
+            <a:avLst/>
+          </a:prstGeom>
+        </p:spPr>
+      </p:pic>
+      <p:sp>
+        <p:nvSpPr>
+          <p:cNvPr id="16" name="Freeform 5">
+            <a:extLst>
+              <a:ext uri="{FF2B5EF4-FFF2-40B4-BE49-F238E27FC236}">
+                <a16:creationId xmlns:a16="http://schemas.microsoft.com/office/drawing/2014/main" id="{F3798573-F27B-47EB-8EA4-7EE34954C2D6}"/>
+              </a:ext>
+              <a:ext uri="{C183D7F6-B498-43B3-948B-1728B52AA6E4}">
+                <adec:decorative xmlns:adec="http://schemas.microsoft.com/office/drawing/2017/decorative" val="1"/>
+              </a:ext>
+            </a:extLst>
+          </p:cNvPr>
+          <p:cNvSpPr>
+            <a:spLocks noGrp="1" noRot="1" noChangeAspect="1" noMove="1" noResize="1" noEditPoints="1" noAdjustHandles="1" noChangeArrowheads="1" noChangeShapeType="1" noTextEdit="1"/>
+          </p:cNvSpPr>
+          <p:nvPr>
+            <p:extLst>
+              <p:ext uri="{386F3935-93C4-4BCD-93E2-E3B085C9AB24}">
+                <p16:designElem xmlns:p16="http://schemas.microsoft.com/office/powerpoint/2015/main" val="1"/>
+              </p:ext>
+            </p:extLst>
+          </p:nvPr>
+        </p:nvSpPr>
+        <p:spPr bwMode="gray">
+          <a:xfrm>
+            <a:off x="-1588" y="0"/>
+            <a:ext cx="12192000" cy="6856413"/>
+          </a:xfrm>
+          <a:custGeom>
+            <a:avLst/>
+            <a:gdLst/>
+            <a:ahLst/>
+            <a:cxnLst/>
+            <a:rect l="0" t="0" r="r" b="b"/>
+            <a:pathLst>
+              <a:path w="15356" h="8638">
+                <a:moveTo>
+                  <a:pt x="0" y="0"/>
+                </a:moveTo>
+                <a:lnTo>
+                  <a:pt x="0" y="8638"/>
+                </a:lnTo>
+                <a:lnTo>
+                  <a:pt x="15356" y="8638"/>
+                </a:lnTo>
+                <a:lnTo>
+                  <a:pt x="15356" y="0"/>
+                </a:lnTo>
+                <a:lnTo>
+                  <a:pt x="0" y="0"/>
+                </a:lnTo>
+                <a:close/>
+                <a:moveTo>
+                  <a:pt x="14748" y="8038"/>
+                </a:moveTo>
+                <a:lnTo>
+                  <a:pt x="600" y="8038"/>
+                </a:lnTo>
+                <a:lnTo>
+                  <a:pt x="600" y="592"/>
+                </a:lnTo>
+                <a:lnTo>
+                  <a:pt x="14748" y="592"/>
+                </a:lnTo>
+                <a:lnTo>
+                  <a:pt x="14748" y="8038"/>
+                </a:lnTo>
+                <a:close/>
+              </a:path>
+            </a:pathLst>
+          </a:custGeom>
+          <a:solidFill>
+            <a:schemeClr val="tx1"/>
+          </a:solidFill>
+          <a:ln>
+            <a:noFill/>
+          </a:ln>
+        </p:spPr>
+        <p:txBody>
+          <a:bodyPr/>
+          <a:lstStyle/>
+          <a:p>
+            <a:endParaRPr lang="hu-HU"/>
+          </a:p>
+        </p:txBody>
+      </p:sp>
+      <p:sp>
+        <p:nvSpPr>
           <p:cNvPr id="2" name="Cím 1">
             <a:extLst>
               <a:ext uri="{FF2B5EF4-FFF2-40B4-BE49-F238E27FC236}">
@@ -9969,21 +10472,22 @@
         </p:nvSpPr>
         <p:spPr>
           <a:xfrm>
-            <a:off x="3599623" y="727038"/>
-            <a:ext cx="4721417" cy="1400530"/>
+            <a:off x="806195" y="804672"/>
+            <a:ext cx="3521359" cy="5248656"/>
           </a:xfrm>
         </p:spPr>
         <p:txBody>
-          <a:bodyPr/>
+          <a:bodyPr anchor="ctr">
+            <a:normAutofit/>
+          </a:bodyPr>
           <a:lstStyle/>
           <a:p>
-            <a:r>
-              <a:rPr lang="hu-HU" b="1" dirty="0">
-                <a:latin typeface="Times New Roman" panose="02020603050405020304" pitchFamily="18" charset="0"/>
-                <a:cs typeface="Times New Roman" panose="02020603050405020304" pitchFamily="18" charset="0"/>
-              </a:rPr>
+            <a:pPr algn="ctr"/>
+            <a:r>
+              <a:rPr lang="hu-HU" dirty="0"/>
               <a:t>Virtuális szerverek</a:t>
             </a:r>
+            <a:endParaRPr lang="hu-HU"/>
           </a:p>
         </p:txBody>
       </p:sp>
@@ -10005,148 +10509,102 @@
         </p:nvSpPr>
         <p:spPr>
           <a:xfrm>
-            <a:off x="1121600" y="2127568"/>
-            <a:ext cx="8946541" cy="4195481"/>
+            <a:off x="4975861" y="804671"/>
+            <a:ext cx="6399930" cy="5248657"/>
           </a:xfrm>
         </p:spPr>
         <p:txBody>
-          <a:bodyPr/>
+          <a:bodyPr anchor="ctr">
+            <a:normAutofit/>
+          </a:bodyPr>
           <a:lstStyle/>
           <a:p>
             <a:r>
-              <a:rPr lang="hu-HU" dirty="0" err="1">
-                <a:latin typeface="Times New Roman" panose="02020603050405020304" pitchFamily="18" charset="0"/>
-                <a:cs typeface="Times New Roman" panose="02020603050405020304" pitchFamily="18" charset="0"/>
-              </a:rPr>
+              <a:rPr lang="hu-HU" dirty="0" err="1"/>
               <a:t>Virtual</a:t>
             </a:r>
             <a:r>
-              <a:rPr lang="hu-HU" dirty="0">
-                <a:latin typeface="Times New Roman" panose="02020603050405020304" pitchFamily="18" charset="0"/>
-                <a:cs typeface="Times New Roman" panose="02020603050405020304" pitchFamily="18" charset="0"/>
-              </a:rPr>
+              <a:rPr lang="hu-HU" dirty="0"/>
               <a:t> </a:t>
             </a:r>
             <a:r>
-              <a:rPr lang="hu-HU" dirty="0" err="1">
-                <a:latin typeface="Times New Roman" panose="02020603050405020304" pitchFamily="18" charset="0"/>
-                <a:cs typeface="Times New Roman" panose="02020603050405020304" pitchFamily="18" charset="0"/>
-              </a:rPr>
+              <a:rPr lang="hu-HU" dirty="0" err="1"/>
               <a:t>boxot</a:t>
             </a:r>
             <a:r>
-              <a:rPr lang="hu-HU" dirty="0">
-                <a:latin typeface="Times New Roman" panose="02020603050405020304" pitchFamily="18" charset="0"/>
-                <a:cs typeface="Times New Roman" panose="02020603050405020304" pitchFamily="18" charset="0"/>
-              </a:rPr>
+              <a:rPr lang="hu-HU" dirty="0"/>
               <a:t> használtunk</a:t>
             </a:r>
           </a:p>
           <a:p>
             <a:pPr lvl="1"/>
             <a:r>
-              <a:rPr lang="hu-HU" dirty="0">
-                <a:latin typeface="Times New Roman" panose="02020603050405020304" pitchFamily="18" charset="0"/>
-                <a:cs typeface="Times New Roman" panose="02020603050405020304" pitchFamily="18" charset="0"/>
-              </a:rPr>
+              <a:rPr lang="hu-HU" dirty="0"/>
               <a:t>Windows 2019</a:t>
             </a:r>
           </a:p>
           <a:p>
             <a:pPr lvl="2"/>
             <a:r>
-              <a:rPr lang="hu-HU" dirty="0" err="1">
-                <a:latin typeface="Times New Roman" panose="02020603050405020304" pitchFamily="18" charset="0"/>
-                <a:cs typeface="Times New Roman" panose="02020603050405020304" pitchFamily="18" charset="0"/>
-              </a:rPr>
+              <a:rPr lang="hu-HU" dirty="0" err="1"/>
               <a:t>Active</a:t>
             </a:r>
             <a:r>
-              <a:rPr lang="hu-HU" dirty="0">
-                <a:latin typeface="Times New Roman" panose="02020603050405020304" pitchFamily="18" charset="0"/>
-                <a:cs typeface="Times New Roman" panose="02020603050405020304" pitchFamily="18" charset="0"/>
-              </a:rPr>
+              <a:rPr lang="hu-HU" dirty="0"/>
               <a:t> </a:t>
             </a:r>
             <a:r>
-              <a:rPr lang="hu-HU" dirty="0" err="1">
-                <a:latin typeface="Times New Roman" panose="02020603050405020304" pitchFamily="18" charset="0"/>
-                <a:cs typeface="Times New Roman" panose="02020603050405020304" pitchFamily="18" charset="0"/>
-              </a:rPr>
+              <a:rPr lang="hu-HU" dirty="0" err="1"/>
               <a:t>Directory</a:t>
             </a:r>
-            <a:endParaRPr lang="hu-HU" dirty="0">
-              <a:latin typeface="Times New Roman" panose="02020603050405020304" pitchFamily="18" charset="0"/>
-              <a:cs typeface="Times New Roman" panose="02020603050405020304" pitchFamily="18" charset="0"/>
-            </a:endParaRPr>
+            <a:endParaRPr lang="hu-HU" dirty="0"/>
           </a:p>
           <a:p>
             <a:pPr lvl="2"/>
             <a:r>
-              <a:rPr lang="hu-HU" dirty="0">
-                <a:latin typeface="Times New Roman" panose="02020603050405020304" pitchFamily="18" charset="0"/>
-                <a:cs typeface="Times New Roman" panose="02020603050405020304" pitchFamily="18" charset="0"/>
-              </a:rPr>
+              <a:rPr lang="hu-HU" dirty="0"/>
               <a:t>DNS szerver</a:t>
             </a:r>
           </a:p>
           <a:p>
             <a:pPr lvl="2"/>
             <a:r>
-              <a:rPr lang="hu-HU" dirty="0">
-                <a:latin typeface="Times New Roman" panose="02020603050405020304" pitchFamily="18" charset="0"/>
-                <a:cs typeface="Times New Roman" panose="02020603050405020304" pitchFamily="18" charset="0"/>
-              </a:rPr>
+              <a:rPr lang="hu-HU" dirty="0"/>
               <a:t>DHCP szerver</a:t>
             </a:r>
           </a:p>
           <a:p>
             <a:pPr lvl="2"/>
             <a:r>
-              <a:rPr lang="hu-HU" dirty="0">
-                <a:latin typeface="Times New Roman" panose="02020603050405020304" pitchFamily="18" charset="0"/>
-                <a:cs typeface="Times New Roman" panose="02020603050405020304" pitchFamily="18" charset="0"/>
-              </a:rPr>
+              <a:rPr lang="hu-HU" dirty="0"/>
               <a:t>HTTP/HTTPS</a:t>
             </a:r>
           </a:p>
           <a:p>
             <a:pPr lvl="2"/>
             <a:r>
-              <a:rPr lang="hu-HU" dirty="0">
-                <a:latin typeface="Times New Roman" panose="02020603050405020304" pitchFamily="18" charset="0"/>
-                <a:cs typeface="Times New Roman" panose="02020603050405020304" pitchFamily="18" charset="0"/>
-              </a:rPr>
+              <a:rPr lang="hu-HU" dirty="0"/>
               <a:t>Nyomtató és fájl megosztás</a:t>
             </a:r>
           </a:p>
           <a:p>
             <a:pPr lvl="2"/>
             <a:r>
-              <a:rPr lang="hu-HU" dirty="0">
-                <a:latin typeface="Times New Roman" panose="02020603050405020304" pitchFamily="18" charset="0"/>
-                <a:cs typeface="Times New Roman" panose="02020603050405020304" pitchFamily="18" charset="0"/>
-              </a:rPr>
+              <a:rPr lang="hu-HU" dirty="0"/>
               <a:t>Automatikus szoftvertelepítés</a:t>
             </a:r>
           </a:p>
           <a:p>
             <a:pPr lvl="1"/>
             <a:r>
-              <a:rPr lang="hu-HU" dirty="0">
-                <a:latin typeface="Times New Roman" panose="02020603050405020304" pitchFamily="18" charset="0"/>
-                <a:cs typeface="Times New Roman" panose="02020603050405020304" pitchFamily="18" charset="0"/>
-              </a:rPr>
+              <a:rPr lang="hu-HU" dirty="0"/>
               <a:t>Linux Debian 2013</a:t>
             </a:r>
           </a:p>
           <a:p>
             <a:pPr lvl="2"/>
             <a:r>
-              <a:rPr lang="hu-HU" dirty="0">
-                <a:latin typeface="Times New Roman" panose="02020603050405020304" pitchFamily="18" charset="0"/>
-                <a:cs typeface="Times New Roman" panose="02020603050405020304" pitchFamily="18" charset="0"/>
-              </a:rPr>
+              <a:rPr lang="hu-HU" dirty="0"/>
               <a:t>Automatizált mentés</a:t>
             </a:r>
           </a:p>
@@ -10570,10 +11028,40 @@
       </p:sp>
       <p:pic>
         <p:nvPicPr>
-          <p:cNvPr id="5" name="Kép 4" descr="A képen képernyőkép, kör, Grafika látható  Előfordulhat, hogy a mesterséges intelligencia által létrehozott tartalom helytelen.">
+          <p:cNvPr id="4" name="Kép 3">
             <a:extLst>
               <a:ext uri="{FF2B5EF4-FFF2-40B4-BE49-F238E27FC236}">
-                <a16:creationId xmlns:a16="http://schemas.microsoft.com/office/drawing/2014/main" id="{B59451D4-54E7-3AE2-3F4C-DFD57139F162}"/>
+                <a16:creationId xmlns:a16="http://schemas.microsoft.com/office/drawing/2014/main" id="{98D134F5-F449-1B01-319E-E5B070BA77AE}"/>
+              </a:ext>
+            </a:extLst>
+          </p:cNvPr>
+          <p:cNvPicPr>
+            <a:picLocks noChangeAspect="1"/>
+          </p:cNvPicPr>
+          <p:nvPr/>
+        </p:nvPicPr>
+        <p:blipFill>
+          <a:blip r:embed="rId2"/>
+          <a:stretch>
+            <a:fillRect/>
+          </a:stretch>
+        </p:blipFill>
+        <p:spPr>
+          <a:xfrm>
+            <a:off x="874775" y="6005038"/>
+            <a:ext cx="10442448" cy="536968"/>
+          </a:xfrm>
+          <a:prstGeom prst="rect">
+            <a:avLst/>
+          </a:prstGeom>
+        </p:spPr>
+      </p:pic>
+      <p:pic>
+        <p:nvPicPr>
+          <p:cNvPr id="7" name="Kép 6" descr="A képen képernyőkép, diagram, sor látható&#10;&#10;Előfordulhat, hogy a mesterséges intelligencia által létrehozott tartalom helytelen.">
+            <a:extLst>
+              <a:ext uri="{FF2B5EF4-FFF2-40B4-BE49-F238E27FC236}">
+                <a16:creationId xmlns:a16="http://schemas.microsoft.com/office/drawing/2014/main" id="{E0790870-A089-F46F-1AFF-29522ECD53F9}"/>
               </a:ext>
             </a:extLst>
           </p:cNvPr>
@@ -10596,38 +11084,8 @@
         </p:blipFill>
         <p:spPr>
           <a:xfrm>
-            <a:off x="1539605" y="2373457"/>
-            <a:ext cx="9112788" cy="2920766"/>
-          </a:xfrm>
-          <a:prstGeom prst="rect">
-            <a:avLst/>
-          </a:prstGeom>
-        </p:spPr>
-      </p:pic>
-      <p:pic>
-        <p:nvPicPr>
-          <p:cNvPr id="8" name="Kép 7">
-            <a:extLst>
-              <a:ext uri="{FF2B5EF4-FFF2-40B4-BE49-F238E27FC236}">
-                <a16:creationId xmlns:a16="http://schemas.microsoft.com/office/drawing/2014/main" id="{C30871D6-8B30-C1BD-7B9A-F58FCC584668}"/>
-              </a:ext>
-            </a:extLst>
-          </p:cNvPr>
-          <p:cNvPicPr>
-            <a:picLocks noChangeAspect="1"/>
-          </p:cNvPicPr>
-          <p:nvPr/>
-        </p:nvPicPr>
-        <p:blipFill>
-          <a:blip r:embed="rId4"/>
-          <a:stretch>
-            <a:fillRect/>
-          </a:stretch>
-        </p:blipFill>
-        <p:spPr>
-          <a:xfrm>
-            <a:off x="1425448" y="5837395"/>
-            <a:ext cx="9341103" cy="736994"/>
+            <a:off x="1960924" y="2496947"/>
+            <a:ext cx="7776375" cy="2945597"/>
           </a:xfrm>
           <a:prstGeom prst="rect">
             <a:avLst/>
@@ -10637,7 +11095,7 @@
     </p:spTree>
     <p:extLst>
       <p:ext uri="{BB962C8B-B14F-4D97-AF65-F5344CB8AC3E}">
-        <p14:creationId xmlns:p14="http://schemas.microsoft.com/office/powerpoint/2010/main" val="3436962043"/>
+        <p14:creationId xmlns:p14="http://schemas.microsoft.com/office/powerpoint/2010/main" val="1855183194"/>
       </p:ext>
     </p:extLst>
   </p:cSld>

--- a/Kovta_Nyrt_HU.pptx
+++ b/Kovta_Nyrt_HU.pptx
@@ -2049,7 +2049,7 @@
           <a:p>
             <a:fld id="{64E71317-EACD-4ACE-B971-84E39F8DD59C}" type="datetimeFigureOut">
               <a:rPr lang="hu-HU" smtClean="0"/>
-              <a:t>2026. 03. 03.</a:t>
+              <a:t>2026. 04. 23.</a:t>
             </a:fld>
             <a:endParaRPr lang="hu-HU"/>
           </a:p>
@@ -2336,7 +2336,7 @@
           <a:p>
             <a:fld id="{64E71317-EACD-4ACE-B971-84E39F8DD59C}" type="datetimeFigureOut">
               <a:rPr lang="hu-HU" smtClean="0"/>
-              <a:t>2026. 03. 03.</a:t>
+              <a:t>2026. 04. 23.</a:t>
             </a:fld>
             <a:endParaRPr lang="hu-HU"/>
           </a:p>
@@ -2542,7 +2542,7 @@
           <a:p>
             <a:fld id="{64E71317-EACD-4ACE-B971-84E39F8DD59C}" type="datetimeFigureOut">
               <a:rPr lang="hu-HU" smtClean="0"/>
-              <a:t>2026. 03. 03.</a:t>
+              <a:t>2026. 04. 23.</a:t>
             </a:fld>
             <a:endParaRPr lang="hu-HU"/>
           </a:p>
@@ -2827,7 +2827,7 @@
           <a:p>
             <a:fld id="{64E71317-EACD-4ACE-B971-84E39F8DD59C}" type="datetimeFigureOut">
               <a:rPr lang="hu-HU" smtClean="0"/>
-              <a:t>2026. 03. 03.</a:t>
+              <a:t>2026. 04. 23.</a:t>
             </a:fld>
             <a:endParaRPr lang="hu-HU"/>
           </a:p>
@@ -3180,7 +3180,7 @@
           <a:p>
             <a:fld id="{64E71317-EACD-4ACE-B971-84E39F8DD59C}" type="datetimeFigureOut">
               <a:rPr lang="hu-HU" smtClean="0"/>
-              <a:t>2026. 03. 03.</a:t>
+              <a:t>2026. 04. 23.</a:t>
             </a:fld>
             <a:endParaRPr lang="hu-HU"/>
           </a:p>
@@ -3815,7 +3815,7 @@
           <a:p>
             <a:fld id="{64E71317-EACD-4ACE-B971-84E39F8DD59C}" type="datetimeFigureOut">
               <a:rPr lang="hu-HU" smtClean="0"/>
-              <a:t>2026. 03. 03.</a:t>
+              <a:t>2026. 04. 23.</a:t>
             </a:fld>
             <a:endParaRPr lang="hu-HU"/>
           </a:p>
@@ -4687,7 +4687,7 @@
           <a:p>
             <a:fld id="{64E71317-EACD-4ACE-B971-84E39F8DD59C}" type="datetimeFigureOut">
               <a:rPr lang="hu-HU" smtClean="0"/>
-              <a:t>2026. 03. 03.</a:t>
+              <a:t>2026. 04. 23.</a:t>
             </a:fld>
             <a:endParaRPr lang="hu-HU"/>
           </a:p>
@@ -4869,7 +4869,7 @@
           <a:p>
             <a:fld id="{64E71317-EACD-4ACE-B971-84E39F8DD59C}" type="datetimeFigureOut">
               <a:rPr lang="hu-HU" smtClean="0"/>
-              <a:t>2026. 03. 03.</a:t>
+              <a:t>2026. 04. 23.</a:t>
             </a:fld>
             <a:endParaRPr lang="hu-HU"/>
           </a:p>
@@ -5061,7 +5061,7 @@
           <a:p>
             <a:fld id="{64E71317-EACD-4ACE-B971-84E39F8DD59C}" type="datetimeFigureOut">
               <a:rPr lang="hu-HU" smtClean="0"/>
-              <a:t>2026. 03. 03.</a:t>
+              <a:t>2026. 04. 23.</a:t>
             </a:fld>
             <a:endParaRPr lang="hu-HU"/>
           </a:p>
@@ -5243,7 +5243,7 @@
           <a:p>
             <a:fld id="{64E71317-EACD-4ACE-B971-84E39F8DD59C}" type="datetimeFigureOut">
               <a:rPr lang="hu-HU" smtClean="0"/>
-              <a:t>2026. 03. 03.</a:t>
+              <a:t>2026. 04. 23.</a:t>
             </a:fld>
             <a:endParaRPr lang="hu-HU"/>
           </a:p>
@@ -5502,7 +5502,7 @@
           <a:p>
             <a:fld id="{64E71317-EACD-4ACE-B971-84E39F8DD59C}" type="datetimeFigureOut">
               <a:rPr lang="hu-HU" smtClean="0"/>
-              <a:t>2026. 03. 03.</a:t>
+              <a:t>2026. 04. 23.</a:t>
             </a:fld>
             <a:endParaRPr lang="hu-HU"/>
           </a:p>
@@ -5806,7 +5806,7 @@
           <a:p>
             <a:fld id="{64E71317-EACD-4ACE-B971-84E39F8DD59C}" type="datetimeFigureOut">
               <a:rPr lang="hu-HU" smtClean="0"/>
-              <a:t>2026. 03. 03.</a:t>
+              <a:t>2026. 04. 23.</a:t>
             </a:fld>
             <a:endParaRPr lang="hu-HU"/>
           </a:p>
@@ -6262,7 +6262,7 @@
           <a:p>
             <a:fld id="{64E71317-EACD-4ACE-B971-84E39F8DD59C}" type="datetimeFigureOut">
               <a:rPr lang="hu-HU" smtClean="0"/>
-              <a:t>2026. 03. 03.</a:t>
+              <a:t>2026. 04. 23.</a:t>
             </a:fld>
             <a:endParaRPr lang="hu-HU"/>
           </a:p>
@@ -6392,7 +6392,7 @@
           <a:p>
             <a:fld id="{64E71317-EACD-4ACE-B971-84E39F8DD59C}" type="datetimeFigureOut">
               <a:rPr lang="hu-HU" smtClean="0"/>
-              <a:t>2026. 03. 03.</a:t>
+              <a:t>2026. 04. 23.</a:t>
             </a:fld>
             <a:endParaRPr lang="hu-HU"/>
           </a:p>
@@ -6499,7 +6499,7 @@
           <a:p>
             <a:fld id="{64E71317-EACD-4ACE-B971-84E39F8DD59C}" type="datetimeFigureOut">
               <a:rPr lang="hu-HU" smtClean="0"/>
-              <a:t>2026. 03. 03.</a:t>
+              <a:t>2026. 04. 23.</a:t>
             </a:fld>
             <a:endParaRPr lang="hu-HU"/>
           </a:p>
@@ -6790,7 +6790,7 @@
           <a:p>
             <a:fld id="{64E71317-EACD-4ACE-B971-84E39F8DD59C}" type="datetimeFigureOut">
               <a:rPr lang="hu-HU" smtClean="0"/>
-              <a:t>2026. 03. 03.</a:t>
+              <a:t>2026. 04. 23.</a:t>
             </a:fld>
             <a:endParaRPr lang="hu-HU"/>
           </a:p>
@@ -7077,7 +7077,7 @@
           <a:p>
             <a:fld id="{64E71317-EACD-4ACE-B971-84E39F8DD59C}" type="datetimeFigureOut">
               <a:rPr lang="hu-HU" smtClean="0"/>
-              <a:t>2026. 03. 03.</a:t>
+              <a:t>2026. 04. 23.</a:t>
             </a:fld>
             <a:endParaRPr lang="hu-HU"/>
           </a:p>
@@ -7532,7 +7532,7 @@
           <a:p>
             <a:fld id="{64E71317-EACD-4ACE-B971-84E39F8DD59C}" type="datetimeFigureOut">
               <a:rPr lang="hu-HU" smtClean="0"/>
-              <a:t>2026. 03. 03.</a:t>
+              <a:t>2026. 04. 23.</a:t>
             </a:fld>
             <a:endParaRPr lang="hu-HU"/>
           </a:p>
@@ -10638,6 +10638,30 @@
 <file path=ppt/slides/slide13.xml><?xml version="1.0" encoding="utf-8"?>
 <p:sld xmlns:a="http://schemas.openxmlformats.org/drawingml/2006/main" xmlns:r="http://schemas.openxmlformats.org/officeDocument/2006/relationships" xmlns:p="http://schemas.openxmlformats.org/presentationml/2006/main">
   <p:cSld>
+    <p:bg>
+      <p:bgPr>
+        <a:blipFill rotWithShape="1">
+          <a:blip r:embed="rId3">
+            <a:duotone>
+              <a:schemeClr val="bg2">
+                <a:shade val="69000"/>
+                <a:hueMod val="108000"/>
+                <a:satMod val="164000"/>
+                <a:lumMod val="74000"/>
+              </a:schemeClr>
+              <a:schemeClr val="bg2">
+                <a:tint val="96000"/>
+                <a:hueMod val="88000"/>
+                <a:satMod val="140000"/>
+                <a:lumMod val="132000"/>
+              </a:schemeClr>
+            </a:duotone>
+          </a:blip>
+          <a:stretch/>
+        </a:blipFill>
+        <a:effectLst/>
+      </p:bgPr>
+    </p:bg>
     <p:spTree>
       <p:nvGrpSpPr>
         <p:cNvPr id="1" name=""/>
@@ -10670,12 +10694,14 @@
         </p:nvSpPr>
         <p:spPr>
           <a:xfrm>
-            <a:off x="729796" y="677335"/>
-            <a:ext cx="3020937" cy="778932"/>
+            <a:off x="646111" y="609601"/>
+            <a:ext cx="4793473" cy="1675975"/>
           </a:xfrm>
         </p:spPr>
         <p:txBody>
-          <a:bodyPr/>
+          <a:bodyPr>
+            <a:normAutofit/>
+          </a:bodyPr>
           <a:lstStyle/>
           <a:p>
             <a:r>
@@ -10685,6 +10711,110 @@
               </a:rPr>
               <a:t>GIT</a:t>
             </a:r>
+          </a:p>
+        </p:txBody>
+      </p:sp>
+      <p:pic>
+        <p:nvPicPr>
+          <p:cNvPr id="8" name="Kép 7">
+            <a:extLst>
+              <a:ext uri="{FF2B5EF4-FFF2-40B4-BE49-F238E27FC236}">
+                <a16:creationId xmlns:a16="http://schemas.microsoft.com/office/drawing/2014/main" id="{E8A776F8-75B0-3A2A-E0C7-399A37D50B60}"/>
+              </a:ext>
+            </a:extLst>
+          </p:cNvPr>
+          <p:cNvPicPr>
+            <a:picLocks noChangeAspect="1"/>
+          </p:cNvPicPr>
+          <p:nvPr/>
+        </p:nvPicPr>
+        <p:blipFill>
+          <a:blip r:embed="rId4">
+            <a:extLst>
+              <a:ext uri="{28A0092B-C50C-407E-A947-70E740481C1C}">
+                <a14:useLocalDpi xmlns:a14="http://schemas.microsoft.com/office/drawing/2010/main" val="0"/>
+              </a:ext>
+            </a:extLst>
+          </a:blip>
+          <a:srcRect r="5926" b="-1"/>
+          <a:stretch>
+            <a:fillRect/>
+          </a:stretch>
+        </p:blipFill>
+        <p:spPr>
+          <a:xfrm>
+            <a:off x="6094412" y="609137"/>
+            <a:ext cx="5449888" cy="2766290"/>
+          </a:xfrm>
+          <a:prstGeom prst="rect">
+            <a:avLst/>
+          </a:prstGeom>
+          <a:effectLst>
+            <a:outerShdw blurRad="50800" dist="38100" dir="5400000" algn="t" rotWithShape="0">
+              <a:prstClr val="black">
+                <a:alpha val="43000"/>
+              </a:prstClr>
+            </a:outerShdw>
+          </a:effectLst>
+        </p:spPr>
+      </p:pic>
+      <p:sp>
+        <p:nvSpPr>
+          <p:cNvPr id="13" name="Rectangle 12">
+            <a:extLst>
+              <a:ext uri="{FF2B5EF4-FFF2-40B4-BE49-F238E27FC236}">
+                <a16:creationId xmlns:a16="http://schemas.microsoft.com/office/drawing/2014/main" id="{AC546BE4-C7A3-4A47-9FA5-0866D5E656B4}"/>
+              </a:ext>
+              <a:ext uri="{C183D7F6-B498-43B3-948B-1728B52AA6E4}">
+                <adec:decorative xmlns:adec="http://schemas.microsoft.com/office/drawing/2017/decorative" val="1"/>
+              </a:ext>
+            </a:extLst>
+          </p:cNvPr>
+          <p:cNvSpPr>
+            <a:spLocks noGrp="1" noRot="1" noChangeAspect="1" noMove="1" noResize="1" noEditPoints="1" noAdjustHandles="1" noChangeArrowheads="1" noChangeShapeType="1" noTextEdit="1"/>
+          </p:cNvSpPr>
+          <p:nvPr>
+            <p:extLst>
+              <p:ext uri="{386F3935-93C4-4BCD-93E2-E3B085C9AB24}">
+                <p16:designElem xmlns:p16="http://schemas.microsoft.com/office/powerpoint/2015/main" val="1"/>
+              </p:ext>
+            </p:extLst>
+          </p:nvPr>
+        </p:nvSpPr>
+        <p:spPr>
+          <a:xfrm>
+            <a:off x="10437812" y="0"/>
+            <a:ext cx="685800" cy="1143000"/>
+          </a:xfrm>
+          <a:prstGeom prst="rect">
+            <a:avLst/>
+          </a:prstGeom>
+          <a:solidFill>
+            <a:schemeClr val="accent1"/>
+          </a:solidFill>
+          <a:ln>
+            <a:noFill/>
+          </a:ln>
+        </p:spPr>
+        <p:style>
+          <a:lnRef idx="1">
+            <a:schemeClr val="accent1"/>
+          </a:lnRef>
+          <a:fillRef idx="3">
+            <a:schemeClr val="accent1"/>
+          </a:fillRef>
+          <a:effectRef idx="2">
+            <a:schemeClr val="accent1"/>
+          </a:effectRef>
+          <a:fontRef idx="minor">
+            <a:schemeClr val="lt1"/>
+          </a:fontRef>
+        </p:style>
+        <p:txBody>
+          <a:bodyPr/>
+          <a:lstStyle/>
+          <a:p>
+            <a:endParaRPr lang="hu-HU"/>
           </a:p>
         </p:txBody>
       </p:sp>
@@ -10706,24 +10836,23 @@
         </p:nvSpPr>
         <p:spPr>
           <a:xfrm>
-            <a:off x="1103312" y="1691092"/>
-            <a:ext cx="8946541" cy="1147482"/>
+            <a:off x="642175" y="2484544"/>
+            <a:ext cx="4799145" cy="3763855"/>
           </a:xfrm>
         </p:spPr>
         <p:txBody>
-          <a:bodyPr/>
+          <a:bodyPr>
+            <a:normAutofit/>
+          </a:bodyPr>
           <a:lstStyle/>
           <a:p>
-            <a:pPr algn="just">
-              <a:lnSpc>
-                <a:spcPct val="115000"/>
-              </a:lnSpc>
+            <a:pPr>
               <a:spcAft>
                 <a:spcPts val="600"/>
               </a:spcAft>
             </a:pPr>
             <a:r>
-              <a:rPr lang="hu-HU" sz="1800" dirty="0">
+              <a:rPr lang="hu-HU">
                 <a:effectLst/>
                 <a:latin typeface="Times New Roman" panose="02020603050405020304" pitchFamily="18" charset="0"/>
                 <a:ea typeface="Aptos" panose="020B0004020202020204" pitchFamily="34" charset="0"/>
@@ -10731,7 +10860,7 @@
               <a:t>A </a:t>
             </a:r>
             <a:r>
-              <a:rPr lang="hu-HU" sz="1800" dirty="0" err="1">
+              <a:rPr lang="hu-HU" err="1">
                 <a:effectLst/>
                 <a:latin typeface="Times New Roman" panose="02020603050405020304" pitchFamily="18" charset="0"/>
                 <a:ea typeface="Aptos" panose="020B0004020202020204" pitchFamily="34" charset="0"/>
@@ -10739,23 +10868,23 @@
               <a:t>Git</a:t>
             </a:r>
             <a:r>
-              <a:rPr lang="hu-HU" sz="1800" dirty="0">
+              <a:rPr lang="hu-HU">
                 <a:effectLst/>
                 <a:latin typeface="Times New Roman" panose="02020603050405020304" pitchFamily="18" charset="0"/>
                 <a:ea typeface="Aptos" panose="020B0004020202020204" pitchFamily="34" charset="0"/>
               </a:rPr>
               <a:t> egy verziókezelő rendszer, amely a kód változásainak hatékony kezelésére és nyomon követésére használható. Lehetővé teszi a fejlesztők számára a különböző fájlverziók kezelését és módosítását, így lehetőség nyílik az előző állapotok visszaállítására.</a:t>
             </a:r>
-            <a:endParaRPr lang="hu-HU" dirty="0"/>
+            <a:endParaRPr lang="hu-HU"/>
           </a:p>
         </p:txBody>
       </p:sp>
       <p:pic>
         <p:nvPicPr>
-          <p:cNvPr id="5" name="Kép 4">
+          <p:cNvPr id="6" name="Kép 5">
             <a:extLst>
               <a:ext uri="{FF2B5EF4-FFF2-40B4-BE49-F238E27FC236}">
-                <a16:creationId xmlns:a16="http://schemas.microsoft.com/office/drawing/2014/main" id="{3ECB429A-A68C-B41E-20D5-939DECB5D4BA}"/>
+                <a16:creationId xmlns:a16="http://schemas.microsoft.com/office/drawing/2014/main" id="{AF6C2BCC-38D3-3121-BC22-E7AE75A09970}"/>
               </a:ext>
             </a:extLst>
           </p:cNvPr>
@@ -10765,19 +10894,33 @@
           <p:nvPr/>
         </p:nvPicPr>
         <p:blipFill>
-          <a:blip r:embed="rId3"/>
+          <a:blip r:embed="rId5">
+            <a:extLst>
+              <a:ext uri="{28A0092B-C50C-407E-A947-70E740481C1C}">
+                <a14:useLocalDpi xmlns:a14="http://schemas.microsoft.com/office/drawing/2010/main" val="0"/>
+              </a:ext>
+            </a:extLst>
+          </a:blip>
+          <a:srcRect r="5926" b="-1"/>
           <a:stretch>
             <a:fillRect/>
           </a:stretch>
         </p:blipFill>
         <p:spPr>
           <a:xfrm>
-            <a:off x="2297289" y="3073400"/>
-            <a:ext cx="7597422" cy="3598779"/>
+            <a:off x="6094412" y="3482108"/>
+            <a:ext cx="5449888" cy="2766290"/>
           </a:xfrm>
           <a:prstGeom prst="rect">
             <a:avLst/>
           </a:prstGeom>
+          <a:effectLst>
+            <a:outerShdw blurRad="50800" dist="38100" dir="5400000" algn="t" rotWithShape="0">
+              <a:prstClr val="black">
+                <a:alpha val="43000"/>
+              </a:prstClr>
+            </a:outerShdw>
+          </a:effectLst>
         </p:spPr>
       </p:pic>
     </p:spTree>
@@ -10808,6 +10951,30 @@
 <file path=ppt/slides/slide14.xml><?xml version="1.0" encoding="utf-8"?>
 <p:sld xmlns:a="http://schemas.openxmlformats.org/drawingml/2006/main" xmlns:r="http://schemas.openxmlformats.org/officeDocument/2006/relationships" xmlns:p="http://schemas.openxmlformats.org/presentationml/2006/main">
   <p:cSld>
+    <p:bg>
+      <p:bgPr>
+        <a:blipFill rotWithShape="1">
+          <a:blip r:embed="rId3">
+            <a:duotone>
+              <a:schemeClr val="bg2">
+                <a:shade val="69000"/>
+                <a:hueMod val="108000"/>
+                <a:satMod val="164000"/>
+                <a:lumMod val="74000"/>
+              </a:schemeClr>
+              <a:schemeClr val="bg2">
+                <a:tint val="96000"/>
+                <a:hueMod val="88000"/>
+                <a:satMod val="140000"/>
+                <a:lumMod val="132000"/>
+              </a:schemeClr>
+            </a:duotone>
+          </a:blip>
+          <a:stretch/>
+        </a:blipFill>
+        <a:effectLst/>
+      </p:bgPr>
+    </p:bg>
     <p:spTree>
       <p:nvGrpSpPr>
         <p:cNvPr id="1" name=""/>
@@ -10840,12 +11007,14 @@
         </p:nvSpPr>
         <p:spPr>
           <a:xfrm>
-            <a:off x="823912" y="706718"/>
-            <a:ext cx="1165756" cy="690282"/>
+            <a:off x="648930" y="629266"/>
+            <a:ext cx="9252154" cy="1223983"/>
           </a:xfrm>
         </p:spPr>
         <p:txBody>
-          <a:bodyPr/>
+          <a:bodyPr>
+            <a:normAutofit/>
+          </a:bodyPr>
           <a:lstStyle/>
           <a:p>
             <a:r>
@@ -10877,8 +11046,8 @@
         </p:nvSpPr>
         <p:spPr>
           <a:xfrm>
-            <a:off x="1075880" y="1778598"/>
-            <a:ext cx="8946541" cy="4195481"/>
+            <a:off x="737551" y="2793894"/>
+            <a:ext cx="4338409" cy="4196185"/>
           </a:xfrm>
         </p:spPr>
         <p:txBody>
@@ -10888,28 +11057,28 @@
           <a:lstStyle/>
           <a:p>
             <a:r>
-              <a:rPr lang="hu-HU" sz="2200" dirty="0" err="1">
+              <a:rPr lang="hu-HU" dirty="0" err="1">
                 <a:latin typeface="Times New Roman" panose="02020603050405020304" pitchFamily="18" charset="0"/>
                 <a:cs typeface="Times New Roman" panose="02020603050405020304" pitchFamily="18" charset="0"/>
               </a:rPr>
               <a:t>Jira</a:t>
             </a:r>
             <a:r>
-              <a:rPr lang="hu-HU" sz="2200" dirty="0">
+              <a:rPr lang="hu-HU" dirty="0">
                 <a:latin typeface="Times New Roman" panose="02020603050405020304" pitchFamily="18" charset="0"/>
                 <a:cs typeface="Times New Roman" panose="02020603050405020304" pitchFamily="18" charset="0"/>
               </a:rPr>
               <a:t>: A </a:t>
             </a:r>
             <a:r>
-              <a:rPr lang="hu-HU" sz="2200" dirty="0" err="1">
+              <a:rPr lang="hu-HU" dirty="0" err="1">
                 <a:latin typeface="Times New Roman" panose="02020603050405020304" pitchFamily="18" charset="0"/>
                 <a:cs typeface="Times New Roman" panose="02020603050405020304" pitchFamily="18" charset="0"/>
               </a:rPr>
               <a:t>jira-ba</a:t>
             </a:r>
             <a:r>
-              <a:rPr lang="hu-HU" sz="2200" dirty="0">
+              <a:rPr lang="hu-HU" dirty="0">
                 <a:latin typeface="Times New Roman" panose="02020603050405020304" pitchFamily="18" charset="0"/>
                 <a:cs typeface="Times New Roman" panose="02020603050405020304" pitchFamily="18" charset="0"/>
               </a:rPr>
@@ -10920,10 +11089,10 @@
       </p:sp>
       <p:pic>
         <p:nvPicPr>
-          <p:cNvPr id="5" name="Kép 4">
+          <p:cNvPr id="6" name="Kép 5">
             <a:extLst>
               <a:ext uri="{FF2B5EF4-FFF2-40B4-BE49-F238E27FC236}">
-                <a16:creationId xmlns:a16="http://schemas.microsoft.com/office/drawing/2014/main" id="{610B53AA-05ED-4376-94CB-CEE8A3B7EF83}"/>
+                <a16:creationId xmlns:a16="http://schemas.microsoft.com/office/drawing/2014/main" id="{21DB54D0-9CFF-285E-B956-164554CD0FB3}"/>
               </a:ext>
             </a:extLst>
           </p:cNvPr>
@@ -10933,19 +11102,32 @@
           <p:nvPr/>
         </p:nvPicPr>
         <p:blipFill>
-          <a:blip r:embed="rId3"/>
+          <a:blip r:embed="rId4">
+            <a:extLst>
+              <a:ext uri="{28A0092B-C50C-407E-A947-70E740481C1C}">
+                <a14:useLocalDpi xmlns:a14="http://schemas.microsoft.com/office/drawing/2010/main" val="0"/>
+              </a:ext>
+            </a:extLst>
+          </a:blip>
           <a:stretch>
             <a:fillRect/>
           </a:stretch>
         </p:blipFill>
         <p:spPr>
           <a:xfrm>
-            <a:off x="2516612" y="3252004"/>
-            <a:ext cx="7158775" cy="3416433"/>
+            <a:off x="5275007" y="2286000"/>
+            <a:ext cx="6545010" cy="3125241"/>
           </a:xfrm>
           <a:prstGeom prst="rect">
             <a:avLst/>
           </a:prstGeom>
+          <a:effectLst>
+            <a:outerShdw blurRad="50800" dist="38100" dir="5400000" algn="t" rotWithShape="0">
+              <a:prstClr val="black">
+                <a:alpha val="43000"/>
+              </a:prstClr>
+            </a:outerShdw>
+          </a:effectLst>
         </p:spPr>
       </p:pic>
     </p:spTree>
